--- a/Docs/Slides.pptx
+++ b/Docs/Slides.pptx
@@ -17332,35 +17332,8 @@
         </p:blipFill>
         <p:spPr>
           <a:xfrm>
-            <a:off x="0" y="0"/>
-            <a:ext cx="12192000" cy="6858000"/>
-          </a:xfrm>
-          <a:prstGeom prst="rect">
-            <a:avLst/>
-          </a:prstGeom>
-          <a:noFill/>
-          <a:ln>
-            <a:noFill/>
-          </a:ln>
-        </p:spPr>
-      </p:pic>
-      <p:pic>
-        <p:nvPicPr>
-          <p:cNvPr id="181" name="Google Shape;181;p6" descr="image.png"/>
-          <p:cNvPicPr preferRelativeResize="0"/>
-          <p:nvPr/>
-        </p:nvPicPr>
-        <p:blipFill rotWithShape="1">
-          <a:blip r:embed="rId4">
-            <a:alphaModFix/>
-          </a:blip>
-          <a:srcRect/>
-          <a:stretch/>
-        </p:blipFill>
-        <p:spPr>
-          <a:xfrm>
-            <a:off x="762000" y="1497210"/>
-            <a:ext cx="10668000" cy="3562350"/>
+            <a:off x="990600" y="1613464"/>
+            <a:ext cx="5932472" cy="3657108"/>
           </a:xfrm>
           <a:prstGeom prst="rect">
             <a:avLst/>
@@ -17378,7 +17351,7 @@
           <p:nvPr/>
         </p:nvPicPr>
         <p:blipFill rotWithShape="1">
-          <a:blip r:embed="rId5">
+          <a:blip r:embed="rId4">
             <a:alphaModFix/>
           </a:blip>
           <a:srcRect/>
@@ -17386,7 +17359,7 @@
         </p:blipFill>
         <p:spPr>
           <a:xfrm>
-            <a:off x="8763000" y="3009155"/>
+            <a:off x="7662862" y="3173507"/>
             <a:ext cx="2667000" cy="2050405"/>
           </a:xfrm>
           <a:prstGeom prst="rect">
@@ -17441,7 +17414,7 @@
               <a:buNone/>
             </a:pPr>
             <a:r>
-              <a:rPr lang="en-US" sz="1200">
+              <a:rPr lang="en-US" sz="1200" dirty="0" err="1">
                 <a:solidFill>
                   <a:srgbClr val="94A3B8"/>
                 </a:solidFill>
@@ -17450,9 +17423,165 @@
                 <a:cs typeface="Inter"/>
                 <a:sym typeface="Inter"/>
               </a:rPr>
-              <a:t>Custo Mensal para a Empresa por não implementar: R$100 a R$400 por vaga por mês (Consideramos a media: R$250)</a:t>
+              <a:t>Custo</a:t>
             </a:r>
-            <a:endParaRPr sz="1200">
+            <a:r>
+              <a:rPr lang="en-US" sz="1200" dirty="0">
+                <a:solidFill>
+                  <a:srgbClr val="94A3B8"/>
+                </a:solidFill>
+                <a:latin typeface="Inter"/>
+                <a:ea typeface="Inter"/>
+                <a:cs typeface="Inter"/>
+                <a:sym typeface="Inter"/>
+              </a:rPr>
+              <a:t> Mensal para a </a:t>
+            </a:r>
+            <a:r>
+              <a:rPr lang="en-US" sz="1200" dirty="0" err="1">
+                <a:solidFill>
+                  <a:srgbClr val="94A3B8"/>
+                </a:solidFill>
+                <a:latin typeface="Inter"/>
+                <a:ea typeface="Inter"/>
+                <a:cs typeface="Inter"/>
+                <a:sym typeface="Inter"/>
+              </a:rPr>
+              <a:t>Empresa</a:t>
+            </a:r>
+            <a:r>
+              <a:rPr lang="en-US" sz="1200" dirty="0">
+                <a:solidFill>
+                  <a:srgbClr val="94A3B8"/>
+                </a:solidFill>
+                <a:latin typeface="Inter"/>
+                <a:ea typeface="Inter"/>
+                <a:cs typeface="Inter"/>
+                <a:sym typeface="Inter"/>
+              </a:rPr>
+              <a:t> por </a:t>
+            </a:r>
+            <a:r>
+              <a:rPr lang="en-US" sz="1200" dirty="0" err="1">
+                <a:solidFill>
+                  <a:srgbClr val="94A3B8"/>
+                </a:solidFill>
+                <a:latin typeface="Inter"/>
+                <a:ea typeface="Inter"/>
+                <a:cs typeface="Inter"/>
+                <a:sym typeface="Inter"/>
+              </a:rPr>
+              <a:t>não</a:t>
+            </a:r>
+            <a:r>
+              <a:rPr lang="en-US" sz="1200" dirty="0">
+                <a:solidFill>
+                  <a:srgbClr val="94A3B8"/>
+                </a:solidFill>
+                <a:latin typeface="Inter"/>
+                <a:ea typeface="Inter"/>
+                <a:cs typeface="Inter"/>
+                <a:sym typeface="Inter"/>
+              </a:rPr>
+              <a:t> </a:t>
+            </a:r>
+            <a:r>
+              <a:rPr lang="en-US" sz="1200" dirty="0" err="1">
+                <a:solidFill>
+                  <a:srgbClr val="94A3B8"/>
+                </a:solidFill>
+                <a:latin typeface="Inter"/>
+                <a:ea typeface="Inter"/>
+                <a:cs typeface="Inter"/>
+                <a:sym typeface="Inter"/>
+              </a:rPr>
+              <a:t>implementar</a:t>
+            </a:r>
+            <a:r>
+              <a:rPr lang="en-US" sz="1200" dirty="0">
+                <a:solidFill>
+                  <a:srgbClr val="94A3B8"/>
+                </a:solidFill>
+                <a:latin typeface="Inter"/>
+                <a:ea typeface="Inter"/>
+                <a:cs typeface="Inter"/>
+                <a:sym typeface="Inter"/>
+              </a:rPr>
+              <a:t>: R$100 a R$400 por </a:t>
+            </a:r>
+            <a:r>
+              <a:rPr lang="en-US" sz="1200" dirty="0" err="1">
+                <a:solidFill>
+                  <a:srgbClr val="94A3B8"/>
+                </a:solidFill>
+                <a:latin typeface="Inter"/>
+                <a:ea typeface="Inter"/>
+                <a:cs typeface="Inter"/>
+                <a:sym typeface="Inter"/>
+              </a:rPr>
+              <a:t>vaga</a:t>
+            </a:r>
+            <a:r>
+              <a:rPr lang="en-US" sz="1200" dirty="0">
+                <a:solidFill>
+                  <a:srgbClr val="94A3B8"/>
+                </a:solidFill>
+                <a:latin typeface="Inter"/>
+                <a:ea typeface="Inter"/>
+                <a:cs typeface="Inter"/>
+                <a:sym typeface="Inter"/>
+              </a:rPr>
+              <a:t> por </a:t>
+            </a:r>
+            <a:r>
+              <a:rPr lang="en-US" sz="1200" dirty="0" err="1">
+                <a:solidFill>
+                  <a:srgbClr val="94A3B8"/>
+                </a:solidFill>
+                <a:latin typeface="Inter"/>
+                <a:ea typeface="Inter"/>
+                <a:cs typeface="Inter"/>
+                <a:sym typeface="Inter"/>
+              </a:rPr>
+              <a:t>mês</a:t>
+            </a:r>
+            <a:r>
+              <a:rPr lang="en-US" sz="1200" dirty="0">
+                <a:solidFill>
+                  <a:srgbClr val="94A3B8"/>
+                </a:solidFill>
+                <a:latin typeface="Inter"/>
+                <a:ea typeface="Inter"/>
+                <a:cs typeface="Inter"/>
+                <a:sym typeface="Inter"/>
+              </a:rPr>
+              <a:t> (</a:t>
+            </a:r>
+            <a:r>
+              <a:rPr lang="en-US" sz="1200" dirty="0" err="1">
+                <a:solidFill>
+                  <a:srgbClr val="94A3B8"/>
+                </a:solidFill>
+                <a:latin typeface="Inter"/>
+                <a:ea typeface="Inter"/>
+                <a:cs typeface="Inter"/>
+                <a:sym typeface="Inter"/>
+              </a:rPr>
+              <a:t>Consideramos</a:t>
+            </a:r>
+            <a:r>
+              <a:rPr lang="en-US" sz="1200" dirty="0">
+                <a:solidFill>
+                  <a:srgbClr val="94A3B8"/>
+                </a:solidFill>
+                <a:latin typeface="Inter"/>
+                <a:ea typeface="Inter"/>
+                <a:cs typeface="Inter"/>
+                <a:sym typeface="Inter"/>
+              </a:rPr>
+              <a:t> a media: R$250)</a:t>
+            </a:r>
+            <a:endParaRPr sz="1200" dirty="0">
               <a:solidFill>
                 <a:srgbClr val="94A3B8"/>
               </a:solidFill>
@@ -17481,7 +17610,7 @@
               <a:buNone/>
             </a:pPr>
             <a:r>
-              <a:rPr lang="en-US" sz="1200">
+              <a:rPr lang="en-US" sz="1200" dirty="0">
                 <a:solidFill>
                   <a:srgbClr val="94A3B8"/>
                 </a:solidFill>
@@ -17490,9 +17619,165 @@
                 <a:cs typeface="Inter"/>
                 <a:sym typeface="Inter"/>
               </a:rPr>
-              <a:t>No terminal tem 240 vagas se considerar-mos 10% (estimativa) daria um custo mensal de R$6.000 p/mês</a:t>
+              <a:t>No terminal </a:t>
             </a:r>
-            <a:endParaRPr sz="1200">
+            <a:r>
+              <a:rPr lang="en-US" sz="1200" dirty="0" err="1">
+                <a:solidFill>
+                  <a:srgbClr val="94A3B8"/>
+                </a:solidFill>
+                <a:latin typeface="Inter"/>
+                <a:ea typeface="Inter"/>
+                <a:cs typeface="Inter"/>
+                <a:sym typeface="Inter"/>
+              </a:rPr>
+              <a:t>tem</a:t>
+            </a:r>
+            <a:r>
+              <a:rPr lang="en-US" sz="1200" dirty="0">
+                <a:solidFill>
+                  <a:srgbClr val="94A3B8"/>
+                </a:solidFill>
+                <a:latin typeface="Inter"/>
+                <a:ea typeface="Inter"/>
+                <a:cs typeface="Inter"/>
+                <a:sym typeface="Inter"/>
+              </a:rPr>
+              <a:t> 240 </a:t>
+            </a:r>
+            <a:r>
+              <a:rPr lang="en-US" sz="1200" dirty="0" err="1">
+                <a:solidFill>
+                  <a:srgbClr val="94A3B8"/>
+                </a:solidFill>
+                <a:latin typeface="Inter"/>
+                <a:ea typeface="Inter"/>
+                <a:cs typeface="Inter"/>
+                <a:sym typeface="Inter"/>
+              </a:rPr>
+              <a:t>vagas</a:t>
+            </a:r>
+            <a:r>
+              <a:rPr lang="en-US" sz="1200" dirty="0">
+                <a:solidFill>
+                  <a:srgbClr val="94A3B8"/>
+                </a:solidFill>
+                <a:latin typeface="Inter"/>
+                <a:ea typeface="Inter"/>
+                <a:cs typeface="Inter"/>
+                <a:sym typeface="Inter"/>
+              </a:rPr>
+              <a:t> se </a:t>
+            </a:r>
+            <a:r>
+              <a:rPr lang="en-US" sz="1200" dirty="0" err="1">
+                <a:solidFill>
+                  <a:srgbClr val="94A3B8"/>
+                </a:solidFill>
+                <a:latin typeface="Inter"/>
+                <a:ea typeface="Inter"/>
+                <a:cs typeface="Inter"/>
+                <a:sym typeface="Inter"/>
+              </a:rPr>
+              <a:t>considerar-mos</a:t>
+            </a:r>
+            <a:r>
+              <a:rPr lang="en-US" sz="1200" dirty="0">
+                <a:solidFill>
+                  <a:srgbClr val="94A3B8"/>
+                </a:solidFill>
+                <a:latin typeface="Inter"/>
+                <a:ea typeface="Inter"/>
+                <a:cs typeface="Inter"/>
+                <a:sym typeface="Inter"/>
+              </a:rPr>
+              <a:t> 10% (</a:t>
+            </a:r>
+            <a:r>
+              <a:rPr lang="en-US" sz="1200" dirty="0" err="1">
+                <a:solidFill>
+                  <a:srgbClr val="94A3B8"/>
+                </a:solidFill>
+                <a:latin typeface="Inter"/>
+                <a:ea typeface="Inter"/>
+                <a:cs typeface="Inter"/>
+                <a:sym typeface="Inter"/>
+              </a:rPr>
+              <a:t>estimativa</a:t>
+            </a:r>
+            <a:r>
+              <a:rPr lang="en-US" sz="1200" dirty="0">
+                <a:solidFill>
+                  <a:srgbClr val="94A3B8"/>
+                </a:solidFill>
+                <a:latin typeface="Inter"/>
+                <a:ea typeface="Inter"/>
+                <a:cs typeface="Inter"/>
+                <a:sym typeface="Inter"/>
+              </a:rPr>
+              <a:t>) </a:t>
+            </a:r>
+            <a:r>
+              <a:rPr lang="en-US" sz="1200" dirty="0" err="1">
+                <a:solidFill>
+                  <a:srgbClr val="94A3B8"/>
+                </a:solidFill>
+                <a:latin typeface="Inter"/>
+                <a:ea typeface="Inter"/>
+                <a:cs typeface="Inter"/>
+                <a:sym typeface="Inter"/>
+              </a:rPr>
+              <a:t>daria</a:t>
+            </a:r>
+            <a:r>
+              <a:rPr lang="en-US" sz="1200" dirty="0">
+                <a:solidFill>
+                  <a:srgbClr val="94A3B8"/>
+                </a:solidFill>
+                <a:latin typeface="Inter"/>
+                <a:ea typeface="Inter"/>
+                <a:cs typeface="Inter"/>
+                <a:sym typeface="Inter"/>
+              </a:rPr>
+              <a:t> um </a:t>
+            </a:r>
+            <a:r>
+              <a:rPr lang="en-US" sz="1200" dirty="0" err="1">
+                <a:solidFill>
+                  <a:srgbClr val="94A3B8"/>
+                </a:solidFill>
+                <a:latin typeface="Inter"/>
+                <a:ea typeface="Inter"/>
+                <a:cs typeface="Inter"/>
+                <a:sym typeface="Inter"/>
+              </a:rPr>
+              <a:t>custo</a:t>
+            </a:r>
+            <a:r>
+              <a:rPr lang="en-US" sz="1200" dirty="0">
+                <a:solidFill>
+                  <a:srgbClr val="94A3B8"/>
+                </a:solidFill>
+                <a:latin typeface="Inter"/>
+                <a:ea typeface="Inter"/>
+                <a:cs typeface="Inter"/>
+                <a:sym typeface="Inter"/>
+              </a:rPr>
+              <a:t> mensal de R$6.000 p/</a:t>
+            </a:r>
+            <a:r>
+              <a:rPr lang="en-US" sz="1200" dirty="0" err="1">
+                <a:solidFill>
+                  <a:srgbClr val="94A3B8"/>
+                </a:solidFill>
+                <a:latin typeface="Inter"/>
+                <a:ea typeface="Inter"/>
+                <a:cs typeface="Inter"/>
+                <a:sym typeface="Inter"/>
+              </a:rPr>
+              <a:t>mês</a:t>
+            </a:r>
+            <a:endParaRPr sz="1200" dirty="0">
               <a:solidFill>
                 <a:srgbClr val="94A3B8"/>
               </a:solidFill>
@@ -17520,7 +17805,7 @@
               <a:buFont typeface="Arial"/>
               <a:buNone/>
             </a:pPr>
-            <a:endParaRPr sz="1200">
+            <a:endParaRPr sz="1200" dirty="0">
               <a:solidFill>
                 <a:srgbClr val="94A3B8"/>
               </a:solidFill>
@@ -17549,7 +17834,7 @@
               <a:buNone/>
             </a:pPr>
             <a:r>
-              <a:rPr lang="en-US" sz="1200" b="0" i="0" u="none" strike="noStrike" cap="none">
+              <a:rPr lang="en-US" sz="1200" b="0" i="0" u="none" strike="noStrike" cap="none" dirty="0" err="1">
                 <a:solidFill>
                   <a:srgbClr val="94A3B8"/>
                 </a:solidFill>
@@ -17558,10 +17843,70 @@
                 <a:cs typeface="Inter"/>
                 <a:sym typeface="Inter"/>
               </a:rPr>
-              <a:t>Recuperação integral do investimento (CAPEX) no Mês </a:t>
+              <a:t>Recuperação</a:t>
             </a:r>
             <a:r>
-              <a:rPr lang="en-US" sz="1200">
+              <a:rPr lang="en-US" sz="1200" b="0" i="0" u="none" strike="noStrike" cap="none" dirty="0">
+                <a:solidFill>
+                  <a:srgbClr val="94A3B8"/>
+                </a:solidFill>
+                <a:latin typeface="Inter"/>
+                <a:ea typeface="Inter"/>
+                <a:cs typeface="Inter"/>
+                <a:sym typeface="Inter"/>
+              </a:rPr>
+              <a:t> integral do </a:t>
+            </a:r>
+            <a:r>
+              <a:rPr lang="en-US" sz="1200" b="0" i="0" u="none" strike="noStrike" cap="none" dirty="0" err="1">
+                <a:solidFill>
+                  <a:srgbClr val="94A3B8"/>
+                </a:solidFill>
+                <a:latin typeface="Inter"/>
+                <a:ea typeface="Inter"/>
+                <a:cs typeface="Inter"/>
+                <a:sym typeface="Inter"/>
+              </a:rPr>
+              <a:t>investimento</a:t>
+            </a:r>
+            <a:r>
+              <a:rPr lang="en-US" sz="1200" b="0" i="0" u="none" strike="noStrike" cap="none" dirty="0">
+                <a:solidFill>
+                  <a:srgbClr val="94A3B8"/>
+                </a:solidFill>
+                <a:latin typeface="Inter"/>
+                <a:ea typeface="Inter"/>
+                <a:cs typeface="Inter"/>
+                <a:sym typeface="Inter"/>
+              </a:rPr>
+              <a:t> (CAPEX) no </a:t>
+            </a:r>
+            <a:r>
+              <a:rPr lang="en-US" sz="1200" b="0" i="0" u="none" strike="noStrike" cap="none" dirty="0" err="1">
+                <a:solidFill>
+                  <a:srgbClr val="94A3B8"/>
+                </a:solidFill>
+                <a:latin typeface="Inter"/>
+                <a:ea typeface="Inter"/>
+                <a:cs typeface="Inter"/>
+                <a:sym typeface="Inter"/>
+              </a:rPr>
+              <a:t>Mês</a:t>
+            </a:r>
+            <a:r>
+              <a:rPr lang="en-US" sz="1200" b="0" i="0" u="none" strike="noStrike" cap="none" dirty="0">
+                <a:solidFill>
+                  <a:srgbClr val="94A3B8"/>
+                </a:solidFill>
+                <a:latin typeface="Inter"/>
+                <a:ea typeface="Inter"/>
+                <a:cs typeface="Inter"/>
+                <a:sym typeface="Inter"/>
+              </a:rPr>
+              <a:t> </a:t>
+            </a:r>
+            <a:r>
+              <a:rPr lang="en-US" sz="1200" dirty="0">
                 <a:solidFill>
                   <a:srgbClr val="94A3B8"/>
                 </a:solidFill>
@@ -17573,7 +17918,7 @@
               <a:t>4</a:t>
             </a:r>
             <a:r>
-              <a:rPr lang="en-US" sz="1200" b="0" i="0" u="none" strike="noStrike" cap="none">
+              <a:rPr lang="en-US" sz="1200" b="0" i="0" u="none" strike="noStrike" cap="none" dirty="0">
                 <a:solidFill>
                   <a:srgbClr val="94A3B8"/>
                 </a:solidFill>
@@ -17582,204 +17927,24 @@
                 <a:cs typeface="Inter"/>
                 <a:sym typeface="Inter"/>
               </a:rPr>
-              <a:t> da operação.</a:t>
+              <a:t> da </a:t>
             </a:r>
-            <a:endParaRPr sz="1400" b="0" i="0" u="none" strike="noStrike" cap="none">
-              <a:solidFill>
-                <a:srgbClr val="000000"/>
-              </a:solidFill>
-              <a:latin typeface="Arial"/>
-              <a:ea typeface="Arial"/>
-              <a:cs typeface="Arial"/>
-              <a:sym typeface="Arial"/>
-            </a:endParaRPr>
-          </a:p>
-        </p:txBody>
-      </p:sp>
-      <p:sp>
-        <p:nvSpPr>
-          <p:cNvPr id="184" name="Google Shape;184;p6"/>
-          <p:cNvSpPr txBox="1"/>
-          <p:nvPr/>
-        </p:nvSpPr>
-        <p:spPr>
-          <a:xfrm>
-            <a:off x="8996362" y="3497460"/>
-            <a:ext cx="2200200" cy="184800"/>
-          </a:xfrm>
-          <a:prstGeom prst="rect">
-            <a:avLst/>
-          </a:prstGeom>
-          <a:noFill/>
-          <a:ln>
-            <a:noFill/>
-          </a:ln>
-        </p:spPr>
-        <p:txBody>
-          <a:bodyPr spcFirstLastPara="1" wrap="square" lIns="0" tIns="0" rIns="0" bIns="0" anchor="t" anchorCtr="0">
-            <a:spAutoFit/>
-          </a:bodyPr>
-          <a:lstStyle/>
-          <a:p>
-            <a:pPr marL="0" marR="0" lvl="0" indent="0" algn="ctr" rtl="0">
-              <a:lnSpc>
-                <a:spcPct val="100000"/>
-              </a:lnSpc>
-              <a:spcBef>
-                <a:spcPts val="0"/>
-              </a:spcBef>
-              <a:spcAft>
-                <a:spcPts val="0"/>
-              </a:spcAft>
-              <a:buClr>
-                <a:srgbClr val="000000"/>
-              </a:buClr>
-              <a:buSzPts val="1200"/>
-              <a:buFont typeface="Arial"/>
-              <a:buNone/>
-            </a:pPr>
             <a:r>
-              <a:rPr lang="en-US" sz="1200" b="1" i="0" u="none" strike="noStrike" cap="none" dirty="0" err="1">
-                <a:solidFill>
-                  <a:srgbClr val="2DD4BF"/>
+              <a:rPr lang="en-US" sz="1200" b="0" i="0" u="none" strike="noStrike" cap="none" dirty="0" err="1">
+                <a:solidFill>
+                  <a:srgbClr val="94A3B8"/>
                 </a:solidFill>
                 <a:latin typeface="Inter"/>
                 <a:ea typeface="Inter"/>
                 <a:cs typeface="Inter"/>
                 <a:sym typeface="Inter"/>
               </a:rPr>
-              <a:t>Saldo</a:t>
+              <a:t>operação</a:t>
             </a:r>
             <a:r>
-              <a:rPr lang="en-US" sz="1200" b="1" i="0" u="none" strike="noStrike" cap="none" dirty="0">
-                <a:solidFill>
-                  <a:srgbClr val="2DD4BF"/>
-                </a:solidFill>
-                <a:latin typeface="Inter"/>
-                <a:ea typeface="Inter"/>
-                <a:cs typeface="Inter"/>
-                <a:sym typeface="Inter"/>
-              </a:rPr>
-              <a:t> </a:t>
-            </a:r>
-            <a:r>
-              <a:rPr lang="en-US" sz="1200" b="1" dirty="0">
-                <a:solidFill>
-                  <a:srgbClr val="2DD4BF"/>
-                </a:solidFill>
-                <a:latin typeface="Inter"/>
-                <a:ea typeface="Inter"/>
-                <a:cs typeface="Inter"/>
-                <a:sym typeface="Inter"/>
-              </a:rPr>
-              <a:t>(</a:t>
-            </a:r>
-            <a:r>
-              <a:rPr lang="en-US" sz="1200" b="1" dirty="0" err="1">
-                <a:solidFill>
-                  <a:srgbClr val="2DD4BF"/>
-                </a:solidFill>
-                <a:latin typeface="Inter"/>
-                <a:ea typeface="Inter"/>
-                <a:cs typeface="Inter"/>
-                <a:sym typeface="Inter"/>
-              </a:rPr>
-              <a:t>Mês</a:t>
-            </a:r>
-            <a:r>
-              <a:rPr lang="en-US" sz="1200" b="1" dirty="0">
-                <a:solidFill>
-                  <a:srgbClr val="2DD4BF"/>
-                </a:solidFill>
-                <a:latin typeface="Inter"/>
-                <a:ea typeface="Inter"/>
-                <a:cs typeface="Inter"/>
-                <a:sym typeface="Inter"/>
-              </a:rPr>
-              <a:t> 7)</a:t>
-            </a:r>
-            <a:endParaRPr sz="1400" b="0" i="0" u="none" strike="noStrike" cap="none" dirty="0">
-              <a:solidFill>
-                <a:srgbClr val="000000"/>
-              </a:solidFill>
-              <a:latin typeface="Arial"/>
-              <a:ea typeface="Arial"/>
-              <a:cs typeface="Arial"/>
-              <a:sym typeface="Arial"/>
-            </a:endParaRPr>
-          </a:p>
-        </p:txBody>
-      </p:sp>
-      <p:sp>
-        <p:nvSpPr>
-          <p:cNvPr id="185" name="Google Shape;185;p6"/>
-          <p:cNvSpPr txBox="1"/>
-          <p:nvPr/>
-        </p:nvSpPr>
-        <p:spPr>
-          <a:xfrm>
-            <a:off x="9048750" y="3783210"/>
-            <a:ext cx="2095500" cy="415500"/>
-          </a:xfrm>
-          <a:prstGeom prst="rect">
-            <a:avLst/>
-          </a:prstGeom>
-          <a:noFill/>
-          <a:ln>
-            <a:noFill/>
-          </a:ln>
-        </p:spPr>
-        <p:txBody>
-          <a:bodyPr spcFirstLastPara="1" wrap="square" lIns="0" tIns="0" rIns="0" bIns="0" anchor="t" anchorCtr="0">
-            <a:spAutoFit/>
-          </a:bodyPr>
-          <a:lstStyle/>
-          <a:p>
-            <a:pPr marL="0" marR="0" lvl="0" indent="0" algn="ctr" rtl="0">
-              <a:lnSpc>
-                <a:spcPct val="150000"/>
-              </a:lnSpc>
-              <a:spcBef>
-                <a:spcPts val="0"/>
-              </a:spcBef>
-              <a:spcAft>
-                <a:spcPts val="0"/>
-              </a:spcAft>
-              <a:buClr>
-                <a:srgbClr val="000000"/>
-              </a:buClr>
-              <a:buSzPts val="2700"/>
-              <a:buFont typeface="Arial"/>
-              <a:buNone/>
-            </a:pPr>
-            <a:r>
-              <a:rPr lang="en-US" sz="2700" b="1" i="0" u="none" strike="noStrike" cap="none">
-                <a:solidFill>
-                  <a:srgbClr val="F8FAFC"/>
-                </a:solidFill>
-                <a:latin typeface="Inter"/>
-                <a:ea typeface="Inter"/>
-                <a:cs typeface="Inter"/>
-                <a:sym typeface="Inter"/>
-              </a:rPr>
-              <a:t>+ R$ </a:t>
-            </a:r>
-            <a:r>
-              <a:rPr lang="en-US" sz="2700" b="1">
-                <a:solidFill>
-                  <a:srgbClr val="F8FAFC"/>
-                </a:solidFill>
-                <a:latin typeface="Inter"/>
-                <a:ea typeface="Inter"/>
-                <a:cs typeface="Inter"/>
-                <a:sym typeface="Inter"/>
-              </a:rPr>
-              <a:t>7</a:t>
-            </a:r>
-            <a:r>
-              <a:rPr lang="en-US" sz="2700" b="1" i="0" u="none" strike="noStrike" cap="none">
-                <a:solidFill>
-                  <a:srgbClr val="F8FAFC"/>
+              <a:rPr lang="en-US" sz="1200" b="0" i="0" u="none" strike="noStrike" cap="none" dirty="0">
+                <a:solidFill>
+                  <a:srgbClr val="94A3B8"/>
                 </a:solidFill>
                 <a:latin typeface="Inter"/>
                 <a:ea typeface="Inter"/>
@@ -17788,109 +17953,7 @@
               </a:rPr>
               <a:t>.</a:t>
             </a:r>
-            <a:r>
-              <a:rPr lang="en-US" sz="2700" b="1">
-                <a:solidFill>
-                  <a:srgbClr val="F8FAFC"/>
-                </a:solidFill>
-                <a:latin typeface="Inter"/>
-                <a:ea typeface="Inter"/>
-                <a:cs typeface="Inter"/>
-                <a:sym typeface="Inter"/>
-              </a:rPr>
-              <a:t>0</a:t>
-            </a:r>
-            <a:r>
-              <a:rPr lang="en-US" sz="2700" b="1" i="0" u="none" strike="noStrike" cap="none">
-                <a:solidFill>
-                  <a:srgbClr val="F8FAFC"/>
-                </a:solidFill>
-                <a:latin typeface="Inter"/>
-                <a:ea typeface="Inter"/>
-                <a:cs typeface="Inter"/>
-                <a:sym typeface="Inter"/>
-              </a:rPr>
-              <a:t>00</a:t>
-            </a:r>
-            <a:endParaRPr sz="1400" b="0" i="0" u="none" strike="noStrike" cap="none">
-              <a:solidFill>
-                <a:srgbClr val="000000"/>
-              </a:solidFill>
-              <a:latin typeface="Arial"/>
-              <a:ea typeface="Arial"/>
-              <a:cs typeface="Arial"/>
-              <a:sym typeface="Arial"/>
-            </a:endParaRPr>
-          </a:p>
-        </p:txBody>
-      </p:sp>
-      <p:sp>
-        <p:nvSpPr>
-          <p:cNvPr id="186" name="Google Shape;186;p6"/>
-          <p:cNvSpPr txBox="1"/>
-          <p:nvPr/>
-        </p:nvSpPr>
-        <p:spPr>
-          <a:xfrm>
-            <a:off x="9048750" y="4440435"/>
-            <a:ext cx="2095500" cy="200025"/>
-          </a:xfrm>
-          <a:prstGeom prst="rect">
-            <a:avLst/>
-          </a:prstGeom>
-          <a:noFill/>
-          <a:ln>
-            <a:noFill/>
-          </a:ln>
-        </p:spPr>
-        <p:txBody>
-          <a:bodyPr spcFirstLastPara="1" wrap="square" lIns="0" tIns="0" rIns="0" bIns="0" anchor="t" anchorCtr="0">
-            <a:spAutoFit/>
-          </a:bodyPr>
-          <a:lstStyle/>
-          <a:p>
-            <a:pPr marL="0" marR="0" lvl="0" indent="0" algn="ctr" rtl="0">
-              <a:lnSpc>
-                <a:spcPct val="150000"/>
-              </a:lnSpc>
-              <a:spcBef>
-                <a:spcPts val="0"/>
-              </a:spcBef>
-              <a:spcAft>
-                <a:spcPts val="0"/>
-              </a:spcAft>
-              <a:buClr>
-                <a:srgbClr val="000000"/>
-              </a:buClr>
-              <a:buSzPts val="1050"/>
-              <a:buFont typeface="Arial"/>
-              <a:buNone/>
-            </a:pPr>
-            <a:r>
-              <a:rPr lang="en-US" sz="1050" b="0" i="0" u="none" strike="noStrike" cap="none">
-                <a:solidFill>
-                  <a:srgbClr val="94A3B8"/>
-                </a:solidFill>
-                <a:latin typeface="Inter"/>
-                <a:ea typeface="Inter"/>
-                <a:cs typeface="Inter"/>
-                <a:sym typeface="Inter"/>
-              </a:rPr>
-              <a:t>Veredito: </a:t>
-            </a:r>
-            <a:r>
-              <a:rPr lang="en-US" sz="1050" b="1" i="0" u="none" strike="noStrike" cap="none">
-                <a:solidFill>
-                  <a:srgbClr val="94A3B8"/>
-                </a:solidFill>
-                <a:latin typeface="Inter"/>
-                <a:ea typeface="Inter"/>
-                <a:cs typeface="Inter"/>
-                <a:sym typeface="Inter"/>
-              </a:rPr>
-              <a:t>Altamente Viável</a:t>
-            </a:r>
-            <a:endParaRPr sz="1400" b="0" i="0" u="none" strike="noStrike" cap="none">
+            <a:endParaRPr sz="1400" b="0" i="0" u="none" strike="noStrike" cap="none" dirty="0">
               <a:solidFill>
                 <a:srgbClr val="000000"/>
               </a:solidFill>
@@ -18051,14 +18114,14 @@
           <p:nvPr>
             <p:extLst>
               <p:ext uri="{D42A27DB-BD31-4B8C-83A1-F6EECF244321}">
-                <p14:modId xmlns:p14="http://schemas.microsoft.com/office/powerpoint/2010/main" val="2724916638"/>
+                <p14:modId xmlns:p14="http://schemas.microsoft.com/office/powerpoint/2010/main" val="3873522350"/>
               </p:ext>
             </p:extLst>
           </p:nvPr>
         </p:nvGraphicFramePr>
         <p:xfrm>
-          <a:off x="7776936" y="239910"/>
-          <a:ext cx="3805464" cy="2133600"/>
+          <a:off x="7662862" y="1217221"/>
+          <a:ext cx="2715850" cy="1828800"/>
         </p:xfrm>
         <a:graphic>
           <a:graphicData uri="http://schemas.openxmlformats.org/drawingml/2006/table">
@@ -18067,7 +18130,7 @@
                 <a:tableStyleId>{5C22544A-7EE6-4342-B048-85BDC9FD1C3A}</a:tableStyleId>
               </a:tblPr>
               <a:tblGrid>
-                <a:gridCol w="1902732">
+                <a:gridCol w="813118">
                   <a:extLst>
                     <a:ext uri="{9D8B030D-6E8A-4147-A177-3AD203B41FA5}">
                       <a16:colId xmlns:a16="http://schemas.microsoft.com/office/drawing/2014/main" val="20000"/>
@@ -18082,38 +18145,33 @@
                   </a:extLst>
                 </a:gridCol>
               </a:tblGrid>
-              <a:tr h="286968">
+              <a:tr h="260282">
                 <a:tc>
                   <a:txBody>
                     <a:bodyPr/>
                     <a:lstStyle/>
                     <a:p>
                       <a:r>
-                        <a:rPr dirty="0" err="1"/>
+                        <a:rPr lang="pt-BR"/>
                         <a:t>Mês</a:t>
                       </a:r>
-                      <a:endParaRPr dirty="0"/>
                     </a:p>
                   </a:txBody>
-                  <a:tcPr/>
+                  <a:tcPr anchor="ctr"/>
                 </a:tc>
                 <a:tc>
                   <a:txBody>
                     <a:bodyPr/>
                     <a:lstStyle/>
                     <a:p>
+                      <a:pPr algn="r"/>
                       <a:r>
-                        <a:rPr dirty="0"/>
-                        <a:t>Saldo </a:t>
+                        <a:rPr lang="pt-BR"/>
+                        <a:t>Saldo Acumulado</a:t>
                       </a:r>
-                      <a:r>
-                        <a:rPr dirty="0" err="1"/>
-                        <a:t>Acumulado</a:t>
-                      </a:r>
-                      <a:endParaRPr dirty="0"/>
                     </a:p>
                   </a:txBody>
-                  <a:tcPr/>
+                  <a:tcPr anchor="ctr"/>
                 </a:tc>
                 <a:extLst>
                   <a:ext uri="{0D108BD9-81ED-4DB2-BD59-A6C34878D82A}">
@@ -18121,31 +18179,33 @@
                   </a:ext>
                 </a:extLst>
               </a:tr>
-              <a:tr h="286968">
+              <a:tr h="260282">
                 <a:tc>
                   <a:txBody>
                     <a:bodyPr/>
                     <a:lstStyle/>
                     <a:p>
                       <a:r>
+                        <a:rPr lang="pt-BR"/>
                         <a:t>Mês 0</a:t>
                       </a:r>
                     </a:p>
                   </a:txBody>
-                  <a:tcPr/>
+                  <a:tcPr anchor="ctr"/>
                 </a:tc>
                 <a:tc>
                   <a:txBody>
                     <a:bodyPr/>
                     <a:lstStyle/>
                     <a:p>
+                      <a:pPr algn="r"/>
                       <a:r>
-                        <a:rPr dirty="0"/>
+                        <a:rPr lang="pt-BR"/>
                         <a:t>-R$ 22.000</a:t>
                       </a:r>
                     </a:p>
                   </a:txBody>
-                  <a:tcPr/>
+                  <a:tcPr anchor="ctr"/>
                 </a:tc>
                 <a:extLst>
                   <a:ext uri="{0D108BD9-81ED-4DB2-BD59-A6C34878D82A}">
@@ -18153,31 +18213,33 @@
                   </a:ext>
                 </a:extLst>
               </a:tr>
-              <a:tr h="286968">
+              <a:tr h="260282">
                 <a:tc>
                   <a:txBody>
                     <a:bodyPr/>
                     <a:lstStyle/>
                     <a:p>
                       <a:r>
-                        <a:t>Mês 2</a:t>
+                        <a:rPr lang="pt-BR"/>
+                        <a:t>Mês 1</a:t>
                       </a:r>
                     </a:p>
                   </a:txBody>
-                  <a:tcPr/>
+                  <a:tcPr anchor="ctr"/>
                 </a:tc>
                 <a:tc>
                   <a:txBody>
                     <a:bodyPr/>
                     <a:lstStyle/>
                     <a:p>
+                      <a:pPr algn="r"/>
                       <a:r>
-                        <a:rPr dirty="0"/>
-                        <a:t>-R$ 16.000</a:t>
+                        <a:rPr lang="pt-BR" dirty="0"/>
+                        <a:t>-R$ 16.200</a:t>
                       </a:r>
                     </a:p>
                   </a:txBody>
-                  <a:tcPr/>
+                  <a:tcPr anchor="ctr"/>
                 </a:tc>
                 <a:extLst>
                   <a:ext uri="{0D108BD9-81ED-4DB2-BD59-A6C34878D82A}">
@@ -18185,32 +18247,33 @@
                   </a:ext>
                 </a:extLst>
               </a:tr>
-              <a:tr h="286968">
+              <a:tr h="260282">
                 <a:tc>
                   <a:txBody>
                     <a:bodyPr/>
                     <a:lstStyle/>
                     <a:p>
                       <a:r>
-                        <a:t>Mês 4</a:t>
+                        <a:rPr lang="pt-BR"/>
+                        <a:t>Mês 2</a:t>
                       </a:r>
                     </a:p>
                   </a:txBody>
-                  <a:tcPr/>
+                  <a:tcPr anchor="ctr"/>
                 </a:tc>
                 <a:tc>
                   <a:txBody>
                     <a:bodyPr/>
                     <a:lstStyle/>
                     <a:p>
+                      <a:pPr algn="r"/>
                       <a:r>
                         <a:rPr lang="pt-BR" dirty="0"/>
-                        <a:t>-R$ 8.500</a:t>
+                        <a:t>-R$ 10.400</a:t>
                       </a:r>
-                      <a:endParaRPr dirty="0"/>
                     </a:p>
                   </a:txBody>
-                  <a:tcPr/>
+                  <a:tcPr anchor="ctr"/>
                 </a:tc>
                 <a:extLst>
                   <a:ext uri="{0D108BD9-81ED-4DB2-BD59-A6C34878D82A}">
@@ -18218,50 +18281,33 @@
                   </a:ext>
                 </a:extLst>
               </a:tr>
-              <a:tr h="286968">
+              <a:tr h="260282">
                 <a:tc>
                   <a:txBody>
                     <a:bodyPr/>
                     <a:lstStyle/>
                     <a:p>
                       <a:r>
-                        <a:t>Mês 6</a:t>
+                        <a:rPr lang="pt-BR"/>
+                        <a:t>Mês 3</a:t>
                       </a:r>
                     </a:p>
                   </a:txBody>
-                  <a:tcPr/>
+                  <a:tcPr anchor="ctr"/>
                 </a:tc>
                 <a:tc>
                   <a:txBody>
                     <a:bodyPr/>
                     <a:lstStyle/>
                     <a:p>
-                      <a:pPr marL="0" marR="0" lvl="0" indent="0" algn="l" defTabSz="914400" rtl="0" eaLnBrk="1" fontAlgn="auto" latinLnBrk="0" hangingPunct="1">
-                        <a:lnSpc>
-                          <a:spcPct val="100000"/>
-                        </a:lnSpc>
-                        <a:spcBef>
-                          <a:spcPts val="0"/>
-                        </a:spcBef>
-                        <a:spcAft>
-                          <a:spcPts val="0"/>
-                        </a:spcAft>
-                        <a:buClr>
-                          <a:srgbClr val="000000"/>
-                        </a:buClr>
-                        <a:buSzTx/>
-                        <a:buFont typeface="Arial"/>
-                        <a:buNone/>
-                        <a:tabLst/>
-                        <a:defRPr/>
-                      </a:pPr>
+                      <a:pPr algn="r"/>
                       <a:r>
                         <a:rPr lang="pt-BR" dirty="0"/>
-                        <a:t>-R$ 1.250</a:t>
+                        <a:t>-R$ 4.600</a:t>
                       </a:r>
                     </a:p>
                   </a:txBody>
-                  <a:tcPr/>
+                  <a:tcPr anchor="ctr"/>
                 </a:tc>
                 <a:extLst>
                   <a:ext uri="{0D108BD9-81ED-4DB2-BD59-A6C34878D82A}">
@@ -18269,67 +18315,38 @@
                   </a:ext>
                 </a:extLst>
               </a:tr>
-              <a:tr h="286968">
+              <a:tr h="260282">
                 <a:tc>
                   <a:txBody>
                     <a:bodyPr/>
                     <a:lstStyle/>
                     <a:p>
                       <a:r>
-                        <a:t>Mês 7</a:t>
+                        <a:rPr lang="pt-BR"/>
+                        <a:t>Mês 4</a:t>
                       </a:r>
                     </a:p>
                   </a:txBody>
-                  <a:tcPr/>
+                  <a:tcPr anchor="ctr"/>
                 </a:tc>
                 <a:tc>
                   <a:txBody>
                     <a:bodyPr/>
                     <a:lstStyle/>
                     <a:p>
+                      <a:pPr algn="r"/>
                       <a:r>
-                        <a:rPr lang="pt-BR" dirty="0"/>
-                        <a:t>R$ 0</a:t>
+                        <a:rPr lang="pt-BR" b="1" dirty="0"/>
+                        <a:t>+R$ 1.200</a:t>
                       </a:r>
+                      <a:endParaRPr lang="pt-BR" dirty="0"/>
                     </a:p>
                   </a:txBody>
-                  <a:tcPr/>
+                  <a:tcPr anchor="ctr"/>
                 </a:tc>
                 <a:extLst>
                   <a:ext uri="{0D108BD9-81ED-4DB2-BD59-A6C34878D82A}">
                     <a16:rowId xmlns:a16="http://schemas.microsoft.com/office/drawing/2014/main" val="10005"/>
-                  </a:ext>
-                </a:extLst>
-              </a:tr>
-              <a:tr h="286970">
-                <a:tc>
-                  <a:txBody>
-                    <a:bodyPr/>
-                    <a:lstStyle/>
-                    <a:p>
-                      <a:r>
-                        <a:t>Mês 10</a:t>
-                      </a:r>
-                    </a:p>
-                  </a:txBody>
-                  <a:tcPr/>
-                </a:tc>
-                <a:tc>
-                  <a:txBody>
-                    <a:bodyPr/>
-                    <a:lstStyle/>
-                    <a:p>
-                      <a:r>
-                        <a:rPr lang="pt-BR" dirty="0"/>
-                        <a:t>+R$ 3.500</a:t>
-                      </a:r>
-                    </a:p>
-                  </a:txBody>
-                  <a:tcPr/>
-                </a:tc>
-                <a:extLst>
-                  <a:ext uri="{0D108BD9-81ED-4DB2-BD59-A6C34878D82A}">
-                    <a16:rowId xmlns:a16="http://schemas.microsoft.com/office/drawing/2014/main" val="10006"/>
                   </a:ext>
                 </a:extLst>
               </a:tr>
@@ -18352,25 +18369,95 @@
           <p:nvPr/>
         </p:nvPicPr>
         <p:blipFill>
-          <a:blip r:embed="rId6"/>
+          <a:blip r:embed="rId5"/>
           <a:stretch>
             <a:fillRect/>
           </a:stretch>
         </p:blipFill>
         <p:spPr>
           <a:xfrm>
-            <a:off x="8854937" y="3136639"/>
+            <a:off x="7754799" y="3300991"/>
             <a:ext cx="2483049" cy="1795435"/>
           </a:xfrm>
           <a:prstGeom prst="rect">
             <a:avLst/>
           </a:prstGeom>
-          <a:ln>
-            <a:noFill/>
+          <a:solidFill>
+            <a:srgbClr val="FFFFFF">
+              <a:shade val="85000"/>
+            </a:srgbClr>
+          </a:solidFill>
+          <a:ln w="190500" cap="rnd">
+            <a:solidFill>
+              <a:srgbClr val="FFFFFF"/>
+            </a:solidFill>
           </a:ln>
           <a:effectLst>
-            <a:softEdge rad="112500"/>
+            <a:outerShdw blurRad="50000" algn="tl" rotWithShape="0">
+              <a:srgbClr val="000000">
+                <a:alpha val="41000"/>
+              </a:srgbClr>
+            </a:outerShdw>
           </a:effectLst>
+          <a:scene3d>
+            <a:camera prst="orthographicFront"/>
+            <a:lightRig rig="twoPt" dir="t">
+              <a:rot lat="0" lon="0" rev="7800000"/>
+            </a:lightRig>
+          </a:scene3d>
+          <a:sp3d contourW="6350">
+            <a:bevelT w="50800" h="16510"/>
+            <a:contourClr>
+              <a:srgbClr val="C0C0C0"/>
+            </a:contourClr>
+          </a:sp3d>
+        </p:spPr>
+      </p:pic>
+      <p:pic>
+        <p:nvPicPr>
+          <p:cNvPr id="1034" name="Picture 10" descr="Imagem gerada">
+            <a:extLst>
+              <a:ext uri="{FF2B5EF4-FFF2-40B4-BE49-F238E27FC236}">
+                <a16:creationId xmlns:a16="http://schemas.microsoft.com/office/drawing/2014/main" id="{AB595DC7-E313-4643-B278-FEB3AE417EC2}"/>
+              </a:ext>
+            </a:extLst>
+          </p:cNvPr>
+          <p:cNvPicPr>
+            <a:picLocks noChangeAspect="1" noChangeArrowheads="1"/>
+          </p:cNvPicPr>
+          <p:nvPr/>
+        </p:nvPicPr>
+        <p:blipFill>
+          <a:blip r:embed="rId6">
+            <a:extLst>
+              <a:ext uri="{28A0092B-C50C-407E-A947-70E740481C1C}">
+                <a14:useLocalDpi xmlns:a14="http://schemas.microsoft.com/office/drawing/2010/main" val="0"/>
+              </a:ext>
+            </a:extLst>
+          </a:blip>
+          <a:srcRect/>
+          <a:stretch>
+            <a:fillRect/>
+          </a:stretch>
+        </p:blipFill>
+        <p:spPr bwMode="auto">
+          <a:xfrm>
+            <a:off x="456499" y="1613464"/>
+            <a:ext cx="6551571" cy="3657108"/>
+          </a:xfrm>
+          <a:prstGeom prst="rect">
+            <a:avLst/>
+          </a:prstGeom>
+          <a:noFill/>
+          <a:extLst>
+            <a:ext uri="{909E8E84-426E-40DD-AFC4-6F175D3DCCD1}">
+              <a14:hiddenFill xmlns:a14="http://schemas.microsoft.com/office/drawing/2010/main">
+                <a:solidFill>
+                  <a:srgbClr val="FFFFFF"/>
+                </a:solidFill>
+              </a14:hiddenFill>
+            </a:ext>
+          </a:extLst>
         </p:spPr>
       </p:pic>
     </p:spTree>

--- a/Docs/Slides.pptx
+++ b/Docs/Slides.pptx
@@ -11,9 +11,9 @@
     <p:sldId id="256" r:id="rId2"/>
     <p:sldId id="265" r:id="rId3"/>
     <p:sldId id="261" r:id="rId4"/>
-    <p:sldId id="258" r:id="rId5"/>
-    <p:sldId id="259" r:id="rId6"/>
-    <p:sldId id="266" r:id="rId7"/>
+    <p:sldId id="266" r:id="rId5"/>
+    <p:sldId id="258" r:id="rId6"/>
+    <p:sldId id="259" r:id="rId7"/>
     <p:sldId id="262" r:id="rId8"/>
     <p:sldId id="263" r:id="rId9"/>
   </p:sldIdLst>
@@ -1274,6 +1274,133 @@
   <p:cSld>
     <p:spTree>
       <p:nvGrpSpPr>
+        <p:cNvPr id="1" name="Shape 161"/>
+        <p:cNvGrpSpPr/>
+        <p:nvPr/>
+      </p:nvGrpSpPr>
+      <p:grpSpPr>
+        <a:xfrm>
+          <a:off x="0" y="0"/>
+          <a:ext cx="0" cy="0"/>
+          <a:chOff x="0" y="0"/>
+          <a:chExt cx="0" cy="0"/>
+        </a:xfrm>
+      </p:grpSpPr>
+      <p:sp>
+        <p:nvSpPr>
+          <p:cNvPr id="162" name="Google Shape;162;p5:notes"/>
+          <p:cNvSpPr txBox="1">
+            <a:spLocks noGrp="1"/>
+          </p:cNvSpPr>
+          <p:nvPr>
+            <p:ph type="body" idx="1"/>
+          </p:nvPr>
+        </p:nvSpPr>
+        <p:spPr>
+          <a:xfrm>
+            <a:off x="685800" y="4343400"/>
+            <a:ext cx="5486400" cy="4114800"/>
+          </a:xfrm>
+          <a:prstGeom prst="rect">
+            <a:avLst/>
+          </a:prstGeom>
+          <a:noFill/>
+          <a:ln>
+            <a:noFill/>
+          </a:ln>
+        </p:spPr>
+        <p:txBody>
+          <a:bodyPr spcFirstLastPara="1" wrap="square" lIns="91425" tIns="91425" rIns="91425" bIns="91425" anchor="t" anchorCtr="0">
+            <a:noAutofit/>
+          </a:bodyPr>
+          <a:lstStyle/>
+          <a:p>
+            <a:pPr marL="0" lvl="0" indent="0" algn="l" rtl="0">
+              <a:lnSpc>
+                <a:spcPct val="100000"/>
+              </a:lnSpc>
+              <a:spcBef>
+                <a:spcPts val="0"/>
+              </a:spcBef>
+              <a:spcAft>
+                <a:spcPts val="0"/>
+              </a:spcAft>
+              <a:buSzPts val="1100"/>
+              <a:buNone/>
+            </a:pPr>
+            <a:endParaRPr dirty="0"/>
+          </a:p>
+        </p:txBody>
+      </p:sp>
+      <p:sp>
+        <p:nvSpPr>
+          <p:cNvPr id="163" name="Google Shape;163;p5:notes"/>
+          <p:cNvSpPr>
+            <a:spLocks noGrp="1" noRot="1" noChangeAspect="1"/>
+          </p:cNvSpPr>
+          <p:nvPr>
+            <p:ph type="sldImg" idx="2"/>
+          </p:nvPr>
+        </p:nvSpPr>
+        <p:spPr>
+          <a:xfrm>
+            <a:off x="381000" y="685800"/>
+            <a:ext cx="6096000" cy="3429000"/>
+          </a:xfrm>
+          <a:custGeom>
+            <a:avLst/>
+            <a:gdLst/>
+            <a:ahLst/>
+            <a:cxnLst/>
+            <a:rect l="l" t="t" r="r" b="b"/>
+            <a:pathLst>
+              <a:path w="120000" h="120000" extrusionOk="0">
+                <a:moveTo>
+                  <a:pt x="0" y="0"/>
+                </a:moveTo>
+                <a:lnTo>
+                  <a:pt x="120000" y="0"/>
+                </a:lnTo>
+                <a:lnTo>
+                  <a:pt x="120000" y="120000"/>
+                </a:lnTo>
+                <a:lnTo>
+                  <a:pt x="0" y="120000"/>
+                </a:lnTo>
+                <a:close/>
+              </a:path>
+            </a:pathLst>
+          </a:custGeom>
+          <a:noFill/>
+          <a:ln w="9525" cap="flat" cmpd="sng">
+            <a:solidFill>
+              <a:srgbClr val="000000"/>
+            </a:solidFill>
+            <a:prstDash val="solid"/>
+            <a:round/>
+            <a:headEnd type="none" w="sm" len="sm"/>
+            <a:tailEnd type="none" w="sm" len="sm"/>
+          </a:ln>
+        </p:spPr>
+      </p:sp>
+    </p:spTree>
+    <p:extLst>
+      <p:ext uri="{BB962C8B-B14F-4D97-AF65-F5344CB8AC3E}">
+        <p14:creationId xmlns:p14="http://schemas.microsoft.com/office/powerpoint/2010/main" val="4117566628"/>
+      </p:ext>
+    </p:extLst>
+  </p:cSld>
+  <p:clrMapOvr>
+    <a:masterClrMapping/>
+  </p:clrMapOvr>
+</p:notes>
+</file>
+
+<file path=ppt/notesSlides/notesSlide5.xml><?xml version="1.0" encoding="utf-8"?>
+<p:notes xmlns:a="http://schemas.openxmlformats.org/drawingml/2006/main" xmlns:r="http://schemas.openxmlformats.org/officeDocument/2006/relationships" xmlns:p="http://schemas.openxmlformats.org/presentationml/2006/main" showMasterSp="0" showMasterPhAnim="0">
+  <p:cSld>
+    <p:spTree>
+      <p:nvGrpSpPr>
         <p:cNvPr id="1" name="Shape 112"/>
         <p:cNvGrpSpPr/>
         <p:nvPr/>
@@ -1391,7 +1518,7 @@
 </p:notes>
 </file>
 
-<file path=ppt/notesSlides/notesSlide5.xml><?xml version="1.0" encoding="utf-8"?>
+<file path=ppt/notesSlides/notesSlide6.xml><?xml version="1.0" encoding="utf-8"?>
 <p:notes xmlns:a="http://schemas.openxmlformats.org/drawingml/2006/main" xmlns:r="http://schemas.openxmlformats.org/officeDocument/2006/relationships" xmlns:p="http://schemas.openxmlformats.org/presentationml/2006/main" showMasterSp="0" showMasterPhAnim="0">
   <p:cSld>
     <p:spTree>
@@ -1506,133 +1633,6 @@
         </p:spPr>
       </p:sp>
     </p:spTree>
-  </p:cSld>
-  <p:clrMapOvr>
-    <a:masterClrMapping/>
-  </p:clrMapOvr>
-</p:notes>
-</file>
-
-<file path=ppt/notesSlides/notesSlide6.xml><?xml version="1.0" encoding="utf-8"?>
-<p:notes xmlns:a="http://schemas.openxmlformats.org/drawingml/2006/main" xmlns:r="http://schemas.openxmlformats.org/officeDocument/2006/relationships" xmlns:p="http://schemas.openxmlformats.org/presentationml/2006/main" showMasterSp="0" showMasterPhAnim="0">
-  <p:cSld>
-    <p:spTree>
-      <p:nvGrpSpPr>
-        <p:cNvPr id="1" name="Shape 161"/>
-        <p:cNvGrpSpPr/>
-        <p:nvPr/>
-      </p:nvGrpSpPr>
-      <p:grpSpPr>
-        <a:xfrm>
-          <a:off x="0" y="0"/>
-          <a:ext cx="0" cy="0"/>
-          <a:chOff x="0" y="0"/>
-          <a:chExt cx="0" cy="0"/>
-        </a:xfrm>
-      </p:grpSpPr>
-      <p:sp>
-        <p:nvSpPr>
-          <p:cNvPr id="162" name="Google Shape;162;p5:notes"/>
-          <p:cNvSpPr txBox="1">
-            <a:spLocks noGrp="1"/>
-          </p:cNvSpPr>
-          <p:nvPr>
-            <p:ph type="body" idx="1"/>
-          </p:nvPr>
-        </p:nvSpPr>
-        <p:spPr>
-          <a:xfrm>
-            <a:off x="685800" y="4343400"/>
-            <a:ext cx="5486400" cy="4114800"/>
-          </a:xfrm>
-          <a:prstGeom prst="rect">
-            <a:avLst/>
-          </a:prstGeom>
-          <a:noFill/>
-          <a:ln>
-            <a:noFill/>
-          </a:ln>
-        </p:spPr>
-        <p:txBody>
-          <a:bodyPr spcFirstLastPara="1" wrap="square" lIns="91425" tIns="91425" rIns="91425" bIns="91425" anchor="t" anchorCtr="0">
-            <a:noAutofit/>
-          </a:bodyPr>
-          <a:lstStyle/>
-          <a:p>
-            <a:pPr marL="0" lvl="0" indent="0" algn="l" rtl="0">
-              <a:lnSpc>
-                <a:spcPct val="100000"/>
-              </a:lnSpc>
-              <a:spcBef>
-                <a:spcPts val="0"/>
-              </a:spcBef>
-              <a:spcAft>
-                <a:spcPts val="0"/>
-              </a:spcAft>
-              <a:buSzPts val="1100"/>
-              <a:buNone/>
-            </a:pPr>
-            <a:endParaRPr dirty="0"/>
-          </a:p>
-        </p:txBody>
-      </p:sp>
-      <p:sp>
-        <p:nvSpPr>
-          <p:cNvPr id="163" name="Google Shape;163;p5:notes"/>
-          <p:cNvSpPr>
-            <a:spLocks noGrp="1" noRot="1" noChangeAspect="1"/>
-          </p:cNvSpPr>
-          <p:nvPr>
-            <p:ph type="sldImg" idx="2"/>
-          </p:nvPr>
-        </p:nvSpPr>
-        <p:spPr>
-          <a:xfrm>
-            <a:off x="381000" y="685800"/>
-            <a:ext cx="6096000" cy="3429000"/>
-          </a:xfrm>
-          <a:custGeom>
-            <a:avLst/>
-            <a:gdLst/>
-            <a:ahLst/>
-            <a:cxnLst/>
-            <a:rect l="l" t="t" r="r" b="b"/>
-            <a:pathLst>
-              <a:path w="120000" h="120000" extrusionOk="0">
-                <a:moveTo>
-                  <a:pt x="0" y="0"/>
-                </a:moveTo>
-                <a:lnTo>
-                  <a:pt x="120000" y="0"/>
-                </a:lnTo>
-                <a:lnTo>
-                  <a:pt x="120000" y="120000"/>
-                </a:lnTo>
-                <a:lnTo>
-                  <a:pt x="0" y="120000"/>
-                </a:lnTo>
-                <a:close/>
-              </a:path>
-            </a:pathLst>
-          </a:custGeom>
-          <a:noFill/>
-          <a:ln w="9525" cap="flat" cmpd="sng">
-            <a:solidFill>
-              <a:srgbClr val="000000"/>
-            </a:solidFill>
-            <a:prstDash val="solid"/>
-            <a:round/>
-            <a:headEnd type="none" w="sm" len="sm"/>
-            <a:tailEnd type="none" w="sm" len="sm"/>
-          </a:ln>
-        </p:spPr>
-      </p:sp>
-    </p:spTree>
-    <p:extLst>
-      <p:ext uri="{BB962C8B-B14F-4D97-AF65-F5344CB8AC3E}">
-        <p14:creationId xmlns:p14="http://schemas.microsoft.com/office/powerpoint/2010/main" val="4117566628"/>
-      </p:ext>
-    </p:extLst>
   </p:cSld>
   <p:clrMapOvr>
     <a:masterClrMapping/>
@@ -15424,8 +15424,8 @@
         </p:nvSpPr>
         <p:spPr>
           <a:xfrm>
-            <a:off x="1085850" y="3781425"/>
-            <a:ext cx="7010400" cy="628650"/>
+            <a:off x="1371600" y="3714750"/>
+            <a:ext cx="7010400" cy="646331"/>
           </a:xfrm>
           <a:prstGeom prst="rect">
             <a:avLst/>
@@ -15459,7 +15459,7 @@
               <a:buNone/>
             </a:pPr>
             <a:r>
-              <a:rPr lang="en-US" sz="1650" b="0" i="1" u="none" strike="noStrike" cap="none">
+              <a:rPr lang="en-US" sz="2800" b="1" u="sng" strike="noStrike" cap="none" dirty="0">
                 <a:solidFill>
                   <a:srgbClr val="F8FAFC"/>
                 </a:solidFill>
@@ -15468,9 +15468,81 @@
                 <a:cs typeface="Inter"/>
                 <a:sym typeface="Inter"/>
               </a:rPr>
-              <a:t>"Modernizando processos manuais para eliminar erros operacionais e centralizar a gestão de pátio por meio de tecnologia eficiente."</a:t>
+              <a:t>"</a:t>
             </a:r>
-            <a:endParaRPr sz="1400" b="0" i="0" u="none" strike="noStrike" cap="none">
+            <a:r>
+              <a:rPr lang="en-US" sz="2800" b="1" u="sng" strike="noStrike" cap="none" dirty="0" err="1">
+                <a:solidFill>
+                  <a:srgbClr val="F8FAFC"/>
+                </a:solidFill>
+                <a:latin typeface="Inter"/>
+                <a:ea typeface="Inter"/>
+                <a:cs typeface="Inter"/>
+                <a:sym typeface="Inter"/>
+              </a:rPr>
+              <a:t>Modernizando</a:t>
+            </a:r>
+            <a:r>
+              <a:rPr lang="en-US" sz="2800" b="1" u="sng" strike="noStrike" cap="none" dirty="0">
+                <a:solidFill>
+                  <a:srgbClr val="F8FAFC"/>
+                </a:solidFill>
+                <a:latin typeface="Inter"/>
+                <a:ea typeface="Inter"/>
+                <a:cs typeface="Inter"/>
+                <a:sym typeface="Inter"/>
+              </a:rPr>
+              <a:t> </a:t>
+            </a:r>
+            <a:r>
+              <a:rPr lang="en-US" sz="2800" b="1" u="sng" strike="noStrike" cap="none" dirty="0" err="1">
+                <a:solidFill>
+                  <a:srgbClr val="F8FAFC"/>
+                </a:solidFill>
+                <a:latin typeface="Inter"/>
+                <a:ea typeface="Inter"/>
+                <a:cs typeface="Inter"/>
+                <a:sym typeface="Inter"/>
+              </a:rPr>
+              <a:t>processos</a:t>
+            </a:r>
+            <a:r>
+              <a:rPr lang="en-US" sz="2800" b="1" u="sng" strike="noStrike" cap="none" dirty="0">
+                <a:solidFill>
+                  <a:srgbClr val="F8FAFC"/>
+                </a:solidFill>
+                <a:latin typeface="Inter"/>
+                <a:ea typeface="Inter"/>
+                <a:cs typeface="Inter"/>
+                <a:sym typeface="Inter"/>
+              </a:rPr>
+              <a:t> </a:t>
+            </a:r>
+            <a:r>
+              <a:rPr lang="en-US" sz="2800" b="1" u="sng" strike="noStrike" cap="none" dirty="0" err="1">
+                <a:solidFill>
+                  <a:srgbClr val="F8FAFC"/>
+                </a:solidFill>
+                <a:latin typeface="Inter"/>
+                <a:ea typeface="Inter"/>
+                <a:cs typeface="Inter"/>
+                <a:sym typeface="Inter"/>
+              </a:rPr>
+              <a:t>manuais</a:t>
+            </a:r>
+            <a:r>
+              <a:rPr lang="en-US" sz="2800" b="1" u="sng" strike="noStrike" cap="none" dirty="0">
+                <a:solidFill>
+                  <a:srgbClr val="F8FAFC"/>
+                </a:solidFill>
+                <a:latin typeface="Inter"/>
+                <a:ea typeface="Inter"/>
+                <a:cs typeface="Inter"/>
+                <a:sym typeface="Inter"/>
+              </a:rPr>
+              <a:t>”</a:t>
+            </a:r>
+            <a:endParaRPr sz="2400" b="1" u="sng" strike="noStrike" cap="none" dirty="0">
               <a:solidFill>
                 <a:srgbClr val="000000"/>
               </a:solidFill>
@@ -17380,7 +17452,7 @@
         <p:spPr>
           <a:xfrm>
             <a:off x="762000" y="5250060"/>
-            <a:ext cx="10668000" cy="1015800"/>
+            <a:ext cx="10668000" cy="1107996"/>
           </a:xfrm>
           <a:prstGeom prst="rect">
             <a:avLst/>
@@ -17414,7 +17486,7 @@
               <a:buNone/>
             </a:pPr>
             <a:r>
-              <a:rPr lang="en-US" sz="1200" dirty="0" err="1">
+              <a:rPr lang="pt-BR" sz="1200" dirty="0">
                 <a:solidFill>
                   <a:srgbClr val="94A3B8"/>
                 </a:solidFill>
@@ -17423,10 +17495,29 @@
                 <a:cs typeface="Inter"/>
                 <a:sym typeface="Inter"/>
               </a:rPr>
-              <a:t>Custo</a:t>
+              <a:t>Custo Mensal para a Empresa por não implementar: R$100 a R$400 por vaga por mês (Consideramos a media: R$250)</a:t>
             </a:r>
+          </a:p>
+          <a:p>
+            <a:pPr marL="0" marR="0" lvl="0" indent="0" algn="l" rtl="0">
+              <a:lnSpc>
+                <a:spcPct val="150000"/>
+              </a:lnSpc>
+              <a:spcBef>
+                <a:spcPts val="0"/>
+              </a:spcBef>
+              <a:spcAft>
+                <a:spcPts val="0"/>
+              </a:spcAft>
+              <a:buClr>
+                <a:srgbClr val="000000"/>
+              </a:buClr>
+              <a:buSzPts val="1200"/>
+              <a:buFont typeface="Arial"/>
+              <a:buNone/>
+            </a:pPr>
             <a:r>
-              <a:rPr lang="en-US" sz="1200" dirty="0">
+              <a:rPr lang="pt-BR" sz="1200" dirty="0">
                 <a:solidFill>
                   <a:srgbClr val="94A3B8"/>
                 </a:solidFill>
@@ -17435,153 +17526,28 @@
                 <a:cs typeface="Inter"/>
                 <a:sym typeface="Inter"/>
               </a:rPr>
-              <a:t> Mensal para a </a:t>
+              <a:t>No terminal tem 240 vagas se considerarmos 10% (estimativa) daria um custo mensal de R$6.000 p/mês</a:t>
             </a:r>
-            <a:r>
-              <a:rPr lang="en-US" sz="1200" dirty="0" err="1">
-                <a:solidFill>
-                  <a:srgbClr val="94A3B8"/>
-                </a:solidFill>
-                <a:latin typeface="Inter"/>
-                <a:ea typeface="Inter"/>
-                <a:cs typeface="Inter"/>
-                <a:sym typeface="Inter"/>
-              </a:rPr>
-              <a:t>Empresa</a:t>
-            </a:r>
-            <a:r>
-              <a:rPr lang="en-US" sz="1200" dirty="0">
-                <a:solidFill>
-                  <a:srgbClr val="94A3B8"/>
-                </a:solidFill>
-                <a:latin typeface="Inter"/>
-                <a:ea typeface="Inter"/>
-                <a:cs typeface="Inter"/>
-                <a:sym typeface="Inter"/>
-              </a:rPr>
-              <a:t> por </a:t>
-            </a:r>
-            <a:r>
-              <a:rPr lang="en-US" sz="1200" dirty="0" err="1">
-                <a:solidFill>
-                  <a:srgbClr val="94A3B8"/>
-                </a:solidFill>
-                <a:latin typeface="Inter"/>
-                <a:ea typeface="Inter"/>
-                <a:cs typeface="Inter"/>
-                <a:sym typeface="Inter"/>
-              </a:rPr>
-              <a:t>não</a:t>
-            </a:r>
-            <a:r>
-              <a:rPr lang="en-US" sz="1200" dirty="0">
-                <a:solidFill>
-                  <a:srgbClr val="94A3B8"/>
-                </a:solidFill>
-                <a:latin typeface="Inter"/>
-                <a:ea typeface="Inter"/>
-                <a:cs typeface="Inter"/>
-                <a:sym typeface="Inter"/>
-              </a:rPr>
-              <a:t> </a:t>
-            </a:r>
-            <a:r>
-              <a:rPr lang="en-US" sz="1200" dirty="0" err="1">
-                <a:solidFill>
-                  <a:srgbClr val="94A3B8"/>
-                </a:solidFill>
-                <a:latin typeface="Inter"/>
-                <a:ea typeface="Inter"/>
-                <a:cs typeface="Inter"/>
-                <a:sym typeface="Inter"/>
-              </a:rPr>
-              <a:t>implementar</a:t>
-            </a:r>
-            <a:r>
-              <a:rPr lang="en-US" sz="1200" dirty="0">
-                <a:solidFill>
-                  <a:srgbClr val="94A3B8"/>
-                </a:solidFill>
-                <a:latin typeface="Inter"/>
-                <a:ea typeface="Inter"/>
-                <a:cs typeface="Inter"/>
-                <a:sym typeface="Inter"/>
-              </a:rPr>
-              <a:t>: R$100 a R$400 por </a:t>
-            </a:r>
-            <a:r>
-              <a:rPr lang="en-US" sz="1200" dirty="0" err="1">
-                <a:solidFill>
-                  <a:srgbClr val="94A3B8"/>
-                </a:solidFill>
-                <a:latin typeface="Inter"/>
-                <a:ea typeface="Inter"/>
-                <a:cs typeface="Inter"/>
-                <a:sym typeface="Inter"/>
-              </a:rPr>
-              <a:t>vaga</a:t>
-            </a:r>
-            <a:r>
-              <a:rPr lang="en-US" sz="1200" dirty="0">
-                <a:solidFill>
-                  <a:srgbClr val="94A3B8"/>
-                </a:solidFill>
-                <a:latin typeface="Inter"/>
-                <a:ea typeface="Inter"/>
-                <a:cs typeface="Inter"/>
-                <a:sym typeface="Inter"/>
-              </a:rPr>
-              <a:t> por </a:t>
-            </a:r>
-            <a:r>
-              <a:rPr lang="en-US" sz="1200" dirty="0" err="1">
-                <a:solidFill>
-                  <a:srgbClr val="94A3B8"/>
-                </a:solidFill>
-                <a:latin typeface="Inter"/>
-                <a:ea typeface="Inter"/>
-                <a:cs typeface="Inter"/>
-                <a:sym typeface="Inter"/>
-              </a:rPr>
-              <a:t>mês</a:t>
-            </a:r>
-            <a:r>
-              <a:rPr lang="en-US" sz="1200" dirty="0">
-                <a:solidFill>
-                  <a:srgbClr val="94A3B8"/>
-                </a:solidFill>
-                <a:latin typeface="Inter"/>
-                <a:ea typeface="Inter"/>
-                <a:cs typeface="Inter"/>
-                <a:sym typeface="Inter"/>
-              </a:rPr>
-              <a:t> (</a:t>
-            </a:r>
-            <a:r>
-              <a:rPr lang="en-US" sz="1200" dirty="0" err="1">
-                <a:solidFill>
-                  <a:srgbClr val="94A3B8"/>
-                </a:solidFill>
-                <a:latin typeface="Inter"/>
-                <a:ea typeface="Inter"/>
-                <a:cs typeface="Inter"/>
-                <a:sym typeface="Inter"/>
-              </a:rPr>
-              <a:t>Consideramos</a:t>
-            </a:r>
-            <a:r>
-              <a:rPr lang="en-US" sz="1200" dirty="0">
-                <a:solidFill>
-                  <a:srgbClr val="94A3B8"/>
-                </a:solidFill>
-                <a:latin typeface="Inter"/>
-                <a:ea typeface="Inter"/>
-                <a:cs typeface="Inter"/>
-                <a:sym typeface="Inter"/>
-              </a:rPr>
-              <a:t> a media: R$250)</a:t>
-            </a:r>
-            <a:endParaRPr sz="1200" dirty="0">
+          </a:p>
+          <a:p>
+            <a:pPr marL="0" marR="0" lvl="0" indent="0" algn="l" rtl="0">
+              <a:lnSpc>
+                <a:spcPct val="150000"/>
+              </a:lnSpc>
+              <a:spcBef>
+                <a:spcPts val="0"/>
+              </a:spcBef>
+              <a:spcAft>
+                <a:spcPts val="0"/>
+              </a:spcAft>
+              <a:buClr>
+                <a:srgbClr val="000000"/>
+              </a:buClr>
+              <a:buSzPts val="1200"/>
+              <a:buFont typeface="Arial"/>
+              <a:buNone/>
+            </a:pPr>
+            <a:endParaRPr lang="pt-BR" sz="1200" dirty="0">
               <a:solidFill>
                 <a:srgbClr val="94A3B8"/>
               </a:solidFill>
@@ -17610,7 +17576,7 @@
               <a:buNone/>
             </a:pPr>
             <a:r>
-              <a:rPr lang="en-US" sz="1200" dirty="0">
+              <a:rPr lang="pt-BR" sz="1200" b="0" i="0" u="none" strike="noStrike" cap="none" dirty="0">
                 <a:solidFill>
                   <a:srgbClr val="94A3B8"/>
                 </a:solidFill>
@@ -17619,294 +17585,10 @@
                 <a:cs typeface="Inter"/>
                 <a:sym typeface="Inter"/>
               </a:rPr>
-              <a:t>No terminal </a:t>
+              <a:t>Recuperação integral do investimento (CAPEX) no Mês </a:t>
             </a:r>
             <a:r>
-              <a:rPr lang="en-US" sz="1200" dirty="0" err="1">
-                <a:solidFill>
-                  <a:srgbClr val="94A3B8"/>
-                </a:solidFill>
-                <a:latin typeface="Inter"/>
-                <a:ea typeface="Inter"/>
-                <a:cs typeface="Inter"/>
-                <a:sym typeface="Inter"/>
-              </a:rPr>
-              <a:t>tem</a:t>
-            </a:r>
-            <a:r>
-              <a:rPr lang="en-US" sz="1200" dirty="0">
-                <a:solidFill>
-                  <a:srgbClr val="94A3B8"/>
-                </a:solidFill>
-                <a:latin typeface="Inter"/>
-                <a:ea typeface="Inter"/>
-                <a:cs typeface="Inter"/>
-                <a:sym typeface="Inter"/>
-              </a:rPr>
-              <a:t> 240 </a:t>
-            </a:r>
-            <a:r>
-              <a:rPr lang="en-US" sz="1200" dirty="0" err="1">
-                <a:solidFill>
-                  <a:srgbClr val="94A3B8"/>
-                </a:solidFill>
-                <a:latin typeface="Inter"/>
-                <a:ea typeface="Inter"/>
-                <a:cs typeface="Inter"/>
-                <a:sym typeface="Inter"/>
-              </a:rPr>
-              <a:t>vagas</a:t>
-            </a:r>
-            <a:r>
-              <a:rPr lang="en-US" sz="1200" dirty="0">
-                <a:solidFill>
-                  <a:srgbClr val="94A3B8"/>
-                </a:solidFill>
-                <a:latin typeface="Inter"/>
-                <a:ea typeface="Inter"/>
-                <a:cs typeface="Inter"/>
-                <a:sym typeface="Inter"/>
-              </a:rPr>
-              <a:t> se </a:t>
-            </a:r>
-            <a:r>
-              <a:rPr lang="en-US" sz="1200" dirty="0" err="1">
-                <a:solidFill>
-                  <a:srgbClr val="94A3B8"/>
-                </a:solidFill>
-                <a:latin typeface="Inter"/>
-                <a:ea typeface="Inter"/>
-                <a:cs typeface="Inter"/>
-                <a:sym typeface="Inter"/>
-              </a:rPr>
-              <a:t>considerar-mos</a:t>
-            </a:r>
-            <a:r>
-              <a:rPr lang="en-US" sz="1200" dirty="0">
-                <a:solidFill>
-                  <a:srgbClr val="94A3B8"/>
-                </a:solidFill>
-                <a:latin typeface="Inter"/>
-                <a:ea typeface="Inter"/>
-                <a:cs typeface="Inter"/>
-                <a:sym typeface="Inter"/>
-              </a:rPr>
-              <a:t> 10% (</a:t>
-            </a:r>
-            <a:r>
-              <a:rPr lang="en-US" sz="1200" dirty="0" err="1">
-                <a:solidFill>
-                  <a:srgbClr val="94A3B8"/>
-                </a:solidFill>
-                <a:latin typeface="Inter"/>
-                <a:ea typeface="Inter"/>
-                <a:cs typeface="Inter"/>
-                <a:sym typeface="Inter"/>
-              </a:rPr>
-              <a:t>estimativa</a:t>
-            </a:r>
-            <a:r>
-              <a:rPr lang="en-US" sz="1200" dirty="0">
-                <a:solidFill>
-                  <a:srgbClr val="94A3B8"/>
-                </a:solidFill>
-                <a:latin typeface="Inter"/>
-                <a:ea typeface="Inter"/>
-                <a:cs typeface="Inter"/>
-                <a:sym typeface="Inter"/>
-              </a:rPr>
-              <a:t>) </a:t>
-            </a:r>
-            <a:r>
-              <a:rPr lang="en-US" sz="1200" dirty="0" err="1">
-                <a:solidFill>
-                  <a:srgbClr val="94A3B8"/>
-                </a:solidFill>
-                <a:latin typeface="Inter"/>
-                <a:ea typeface="Inter"/>
-                <a:cs typeface="Inter"/>
-                <a:sym typeface="Inter"/>
-              </a:rPr>
-              <a:t>daria</a:t>
-            </a:r>
-            <a:r>
-              <a:rPr lang="en-US" sz="1200" dirty="0">
-                <a:solidFill>
-                  <a:srgbClr val="94A3B8"/>
-                </a:solidFill>
-                <a:latin typeface="Inter"/>
-                <a:ea typeface="Inter"/>
-                <a:cs typeface="Inter"/>
-                <a:sym typeface="Inter"/>
-              </a:rPr>
-              <a:t> um </a:t>
-            </a:r>
-            <a:r>
-              <a:rPr lang="en-US" sz="1200" dirty="0" err="1">
-                <a:solidFill>
-                  <a:srgbClr val="94A3B8"/>
-                </a:solidFill>
-                <a:latin typeface="Inter"/>
-                <a:ea typeface="Inter"/>
-                <a:cs typeface="Inter"/>
-                <a:sym typeface="Inter"/>
-              </a:rPr>
-              <a:t>custo</a:t>
-            </a:r>
-            <a:r>
-              <a:rPr lang="en-US" sz="1200" dirty="0">
-                <a:solidFill>
-                  <a:srgbClr val="94A3B8"/>
-                </a:solidFill>
-                <a:latin typeface="Inter"/>
-                <a:ea typeface="Inter"/>
-                <a:cs typeface="Inter"/>
-                <a:sym typeface="Inter"/>
-              </a:rPr>
-              <a:t> mensal de R$6.000 p/</a:t>
-            </a:r>
-            <a:r>
-              <a:rPr lang="en-US" sz="1200" dirty="0" err="1">
-                <a:solidFill>
-                  <a:srgbClr val="94A3B8"/>
-                </a:solidFill>
-                <a:latin typeface="Inter"/>
-                <a:ea typeface="Inter"/>
-                <a:cs typeface="Inter"/>
-                <a:sym typeface="Inter"/>
-              </a:rPr>
-              <a:t>mês</a:t>
-            </a:r>
-            <a:endParaRPr sz="1200" dirty="0">
-              <a:solidFill>
-                <a:srgbClr val="94A3B8"/>
-              </a:solidFill>
-              <a:latin typeface="Inter"/>
-              <a:ea typeface="Inter"/>
-              <a:cs typeface="Inter"/>
-              <a:sym typeface="Inter"/>
-            </a:endParaRPr>
-          </a:p>
-          <a:p>
-            <a:pPr marL="0" marR="0" lvl="0" indent="0" algn="l" rtl="0">
-              <a:lnSpc>
-                <a:spcPct val="150000"/>
-              </a:lnSpc>
-              <a:spcBef>
-                <a:spcPts val="0"/>
-              </a:spcBef>
-              <a:spcAft>
-                <a:spcPts val="0"/>
-              </a:spcAft>
-              <a:buClr>
-                <a:srgbClr val="000000"/>
-              </a:buClr>
-              <a:buSzPts val="1200"/>
-              <a:buFont typeface="Arial"/>
-              <a:buNone/>
-            </a:pPr>
-            <a:endParaRPr sz="1200" dirty="0">
-              <a:solidFill>
-                <a:srgbClr val="94A3B8"/>
-              </a:solidFill>
-              <a:latin typeface="Inter"/>
-              <a:ea typeface="Inter"/>
-              <a:cs typeface="Inter"/>
-              <a:sym typeface="Inter"/>
-            </a:endParaRPr>
-          </a:p>
-          <a:p>
-            <a:pPr marL="0" marR="0" lvl="0" indent="0" algn="l" rtl="0">
-              <a:lnSpc>
-                <a:spcPct val="150000"/>
-              </a:lnSpc>
-              <a:spcBef>
-                <a:spcPts val="0"/>
-              </a:spcBef>
-              <a:spcAft>
-                <a:spcPts val="0"/>
-              </a:spcAft>
-              <a:buClr>
-                <a:srgbClr val="000000"/>
-              </a:buClr>
-              <a:buSzPts val="1200"/>
-              <a:buFont typeface="Arial"/>
-              <a:buNone/>
-            </a:pPr>
-            <a:r>
-              <a:rPr lang="en-US" sz="1200" b="0" i="0" u="none" strike="noStrike" cap="none" dirty="0" err="1">
-                <a:solidFill>
-                  <a:srgbClr val="94A3B8"/>
-                </a:solidFill>
-                <a:latin typeface="Inter"/>
-                <a:ea typeface="Inter"/>
-                <a:cs typeface="Inter"/>
-                <a:sym typeface="Inter"/>
-              </a:rPr>
-              <a:t>Recuperação</a:t>
-            </a:r>
-            <a:r>
-              <a:rPr lang="en-US" sz="1200" b="0" i="0" u="none" strike="noStrike" cap="none" dirty="0">
-                <a:solidFill>
-                  <a:srgbClr val="94A3B8"/>
-                </a:solidFill>
-                <a:latin typeface="Inter"/>
-                <a:ea typeface="Inter"/>
-                <a:cs typeface="Inter"/>
-                <a:sym typeface="Inter"/>
-              </a:rPr>
-              <a:t> integral do </a:t>
-            </a:r>
-            <a:r>
-              <a:rPr lang="en-US" sz="1200" b="0" i="0" u="none" strike="noStrike" cap="none" dirty="0" err="1">
-                <a:solidFill>
-                  <a:srgbClr val="94A3B8"/>
-                </a:solidFill>
-                <a:latin typeface="Inter"/>
-                <a:ea typeface="Inter"/>
-                <a:cs typeface="Inter"/>
-                <a:sym typeface="Inter"/>
-              </a:rPr>
-              <a:t>investimento</a:t>
-            </a:r>
-            <a:r>
-              <a:rPr lang="en-US" sz="1200" b="0" i="0" u="none" strike="noStrike" cap="none" dirty="0">
-                <a:solidFill>
-                  <a:srgbClr val="94A3B8"/>
-                </a:solidFill>
-                <a:latin typeface="Inter"/>
-                <a:ea typeface="Inter"/>
-                <a:cs typeface="Inter"/>
-                <a:sym typeface="Inter"/>
-              </a:rPr>
-              <a:t> (CAPEX) no </a:t>
-            </a:r>
-            <a:r>
-              <a:rPr lang="en-US" sz="1200" b="0" i="0" u="none" strike="noStrike" cap="none" dirty="0" err="1">
-                <a:solidFill>
-                  <a:srgbClr val="94A3B8"/>
-                </a:solidFill>
-                <a:latin typeface="Inter"/>
-                <a:ea typeface="Inter"/>
-                <a:cs typeface="Inter"/>
-                <a:sym typeface="Inter"/>
-              </a:rPr>
-              <a:t>Mês</a:t>
-            </a:r>
-            <a:r>
-              <a:rPr lang="en-US" sz="1200" b="0" i="0" u="none" strike="noStrike" cap="none" dirty="0">
-                <a:solidFill>
-                  <a:srgbClr val="94A3B8"/>
-                </a:solidFill>
-                <a:latin typeface="Inter"/>
-                <a:ea typeface="Inter"/>
-                <a:cs typeface="Inter"/>
-                <a:sym typeface="Inter"/>
-              </a:rPr>
-              <a:t> </a:t>
-            </a:r>
-            <a:r>
-              <a:rPr lang="en-US" sz="1200" dirty="0">
+              <a:rPr lang="pt-BR" sz="1200" dirty="0">
                 <a:solidFill>
                   <a:srgbClr val="94A3B8"/>
                 </a:solidFill>
@@ -17918,7 +17600,7 @@
               <a:t>4</a:t>
             </a:r>
             <a:r>
-              <a:rPr lang="en-US" sz="1200" b="0" i="0" u="none" strike="noStrike" cap="none" dirty="0">
+              <a:rPr lang="pt-BR" sz="1200" b="0" i="0" u="none" strike="noStrike" cap="none" dirty="0">
                 <a:solidFill>
                   <a:srgbClr val="94A3B8"/>
                 </a:solidFill>
@@ -17927,31 +17609,7 @@
                 <a:cs typeface="Inter"/>
                 <a:sym typeface="Inter"/>
               </a:rPr>
-              <a:t> da </a:t>
-            </a:r>
-            <a:r>
-              <a:rPr lang="en-US" sz="1200" b="0" i="0" u="none" strike="noStrike" cap="none" dirty="0" err="1">
-                <a:solidFill>
-                  <a:srgbClr val="94A3B8"/>
-                </a:solidFill>
-                <a:latin typeface="Inter"/>
-                <a:ea typeface="Inter"/>
-                <a:cs typeface="Inter"/>
-                <a:sym typeface="Inter"/>
-              </a:rPr>
-              <a:t>operação</a:t>
-            </a:r>
-            <a:r>
-              <a:rPr lang="en-US" sz="1200" b="0" i="0" u="none" strike="noStrike" cap="none" dirty="0">
-                <a:solidFill>
-                  <a:srgbClr val="94A3B8"/>
-                </a:solidFill>
-                <a:latin typeface="Inter"/>
-                <a:ea typeface="Inter"/>
-                <a:cs typeface="Inter"/>
-                <a:sym typeface="Inter"/>
-              </a:rPr>
-              <a:t>.</a:t>
+              <a:t> da operação</a:t>
             </a:r>
             <a:endParaRPr sz="1400" b="0" i="0" u="none" strike="noStrike" cap="none" dirty="0">
               <a:solidFill>
@@ -18471,6 +18129,1037 @@
 <file path=ppt/slides/slide4.xml><?xml version="1.0" encoding="utf-8"?>
 <p:sld xmlns:a="http://schemas.openxmlformats.org/drawingml/2006/main" xmlns:r="http://schemas.openxmlformats.org/officeDocument/2006/relationships" xmlns:p="http://schemas.openxmlformats.org/presentationml/2006/main">
   <p:cSld>
+    <p:spTree>
+      <p:nvGrpSpPr>
+        <p:cNvPr id="1" name="Shape 164"/>
+        <p:cNvGrpSpPr/>
+        <p:nvPr/>
+      </p:nvGrpSpPr>
+      <p:grpSpPr>
+        <a:xfrm>
+          <a:off x="0" y="0"/>
+          <a:ext cx="0" cy="0"/>
+          <a:chOff x="0" y="0"/>
+          <a:chExt cx="0" cy="0"/>
+        </a:xfrm>
+      </p:grpSpPr>
+      <p:pic>
+        <p:nvPicPr>
+          <p:cNvPr id="165" name="Google Shape;165;p5" descr="image.png"/>
+          <p:cNvPicPr preferRelativeResize="0"/>
+          <p:nvPr/>
+        </p:nvPicPr>
+        <p:blipFill rotWithShape="1">
+          <a:blip r:embed="rId3">
+            <a:alphaModFix/>
+          </a:blip>
+          <a:srcRect/>
+          <a:stretch/>
+        </p:blipFill>
+        <p:spPr>
+          <a:xfrm>
+            <a:off x="0" y="0"/>
+            <a:ext cx="12192000" cy="6858000"/>
+          </a:xfrm>
+          <a:prstGeom prst="rect">
+            <a:avLst/>
+          </a:prstGeom>
+          <a:noFill/>
+          <a:ln>
+            <a:noFill/>
+          </a:ln>
+        </p:spPr>
+      </p:pic>
+      <p:sp>
+        <p:nvSpPr>
+          <p:cNvPr id="166" name="Google Shape;166;p5"/>
+          <p:cNvSpPr txBox="1"/>
+          <p:nvPr/>
+        </p:nvSpPr>
+        <p:spPr>
+          <a:xfrm>
+            <a:off x="981635" y="638174"/>
+            <a:ext cx="11658600" cy="914096"/>
+          </a:xfrm>
+          <a:prstGeom prst="rect">
+            <a:avLst/>
+          </a:prstGeom>
+          <a:noFill/>
+          <a:ln>
+            <a:noFill/>
+          </a:ln>
+        </p:spPr>
+        <p:txBody>
+          <a:bodyPr spcFirstLastPara="1" wrap="square" lIns="0" tIns="0" rIns="0" bIns="0" anchor="t" anchorCtr="0">
+            <a:spAutoFit/>
+          </a:bodyPr>
+          <a:lstStyle/>
+          <a:p>
+            <a:pPr>
+              <a:lnSpc>
+                <a:spcPct val="110000"/>
+              </a:lnSpc>
+              <a:buSzPts val="3900"/>
+            </a:pPr>
+            <a:r>
+              <a:rPr lang="pt-BR" sz="4000" b="1" i="0" u="none" strike="noStrike" cap="none" dirty="0">
+                <a:solidFill>
+                  <a:schemeClr val="bg1"/>
+                </a:solidFill>
+                <a:latin typeface="Poppins"/>
+                <a:ea typeface="Poppins"/>
+                <a:cs typeface="Poppins"/>
+                <a:sym typeface="Poppins"/>
+              </a:rPr>
+              <a:t>Infraestrutura Cloud &amp; Análise de </a:t>
+            </a:r>
+            <a:r>
+              <a:rPr lang="pt-BR" sz="4000" b="1" i="0" u="none" strike="noStrike" cap="none" dirty="0">
+                <a:solidFill>
+                  <a:srgbClr val="2DD4BF"/>
+                </a:solidFill>
+                <a:latin typeface="Poppins"/>
+                <a:ea typeface="Poppins"/>
+                <a:cs typeface="Poppins"/>
+                <a:sym typeface="Poppins"/>
+              </a:rPr>
+              <a:t>Riscos</a:t>
+            </a:r>
+            <a:endParaRPr lang="pt-BR" sz="4000" dirty="0">
+              <a:solidFill>
+                <a:srgbClr val="2DD4BF"/>
+              </a:solidFill>
+            </a:endParaRPr>
+          </a:p>
+          <a:p>
+            <a:pPr marL="0" marR="0" lvl="0" indent="0" algn="l" rtl="0">
+              <a:lnSpc>
+                <a:spcPct val="110000"/>
+              </a:lnSpc>
+              <a:spcBef>
+                <a:spcPts val="0"/>
+              </a:spcBef>
+              <a:spcAft>
+                <a:spcPts val="0"/>
+              </a:spcAft>
+              <a:buClr>
+                <a:srgbClr val="000000"/>
+              </a:buClr>
+              <a:buSzPts val="3900"/>
+              <a:buFont typeface="Arial"/>
+              <a:buNone/>
+            </a:pPr>
+            <a:endParaRPr sz="1400" b="0" i="0" u="none" strike="noStrike" cap="none" dirty="0">
+              <a:latin typeface="Arial"/>
+              <a:ea typeface="Arial"/>
+              <a:cs typeface="Arial"/>
+              <a:sym typeface="Arial"/>
+            </a:endParaRPr>
+          </a:p>
+        </p:txBody>
+      </p:sp>
+      <p:sp>
+        <p:nvSpPr>
+          <p:cNvPr id="167" name="Google Shape;167;p5"/>
+          <p:cNvSpPr/>
+          <p:nvPr/>
+        </p:nvSpPr>
+        <p:spPr>
+          <a:xfrm>
+            <a:off x="762000" y="762000"/>
+            <a:ext cx="76200" cy="544710"/>
+          </a:xfrm>
+          <a:prstGeom prst="rect">
+            <a:avLst/>
+          </a:prstGeom>
+          <a:solidFill>
+            <a:srgbClr val="2DD4BF"/>
+          </a:solidFill>
+          <a:ln>
+            <a:noFill/>
+          </a:ln>
+        </p:spPr>
+        <p:txBody>
+          <a:bodyPr spcFirstLastPara="1" wrap="square" lIns="91425" tIns="45700" rIns="91425" bIns="45700" anchor="ctr" anchorCtr="0">
+            <a:noAutofit/>
+          </a:bodyPr>
+          <a:lstStyle/>
+          <a:p>
+            <a:pPr marL="0" marR="0" lvl="0" indent="0" algn="ctr" rtl="0">
+              <a:lnSpc>
+                <a:spcPct val="100000"/>
+              </a:lnSpc>
+              <a:spcBef>
+                <a:spcPts val="0"/>
+              </a:spcBef>
+              <a:spcAft>
+                <a:spcPts val="0"/>
+              </a:spcAft>
+              <a:buClr>
+                <a:srgbClr val="000000"/>
+              </a:buClr>
+              <a:buSzPts val="1800"/>
+              <a:buFont typeface="Arial"/>
+              <a:buNone/>
+            </a:pPr>
+            <a:endParaRPr sz="1800" b="0" i="0" u="none" strike="noStrike" cap="none">
+              <a:solidFill>
+                <a:schemeClr val="dk1"/>
+              </a:solidFill>
+              <a:latin typeface="Calibri"/>
+              <a:ea typeface="Calibri"/>
+              <a:cs typeface="Calibri"/>
+              <a:sym typeface="Calibri"/>
+            </a:endParaRPr>
+          </a:p>
+        </p:txBody>
+      </p:sp>
+      <p:sp>
+        <p:nvSpPr>
+          <p:cNvPr id="24" name="Google Shape;175;p17">
+            <a:extLst>
+              <a:ext uri="{FF2B5EF4-FFF2-40B4-BE49-F238E27FC236}">
+                <a16:creationId xmlns:a16="http://schemas.microsoft.com/office/drawing/2014/main" id="{4FADEB63-683E-4702-99A8-50AC58166333}"/>
+              </a:ext>
+            </a:extLst>
+          </p:cNvPr>
+          <p:cNvSpPr txBox="1"/>
+          <p:nvPr/>
+        </p:nvSpPr>
+        <p:spPr>
+          <a:xfrm>
+            <a:off x="5314950" y="1435893"/>
+            <a:ext cx="6420802" cy="371475"/>
+          </a:xfrm>
+          <a:prstGeom prst="rect">
+            <a:avLst/>
+          </a:prstGeom>
+          <a:noFill/>
+          <a:ln>
+            <a:noFill/>
+          </a:ln>
+        </p:spPr>
+        <p:txBody>
+          <a:bodyPr spcFirstLastPara="1" wrap="square" lIns="0" tIns="0" rIns="0" bIns="0" anchor="t" anchorCtr="0">
+            <a:spAutoFit/>
+          </a:bodyPr>
+          <a:lstStyle/>
+          <a:p>
+            <a:pPr marL="0" marR="0" lvl="0" indent="0" algn="l" rtl="0">
+              <a:spcBef>
+                <a:spcPts val="0"/>
+              </a:spcBef>
+              <a:spcAft>
+                <a:spcPts val="0"/>
+              </a:spcAft>
+              <a:buNone/>
+            </a:pPr>
+            <a:r>
+              <a:rPr lang="en-US" sz="1950" b="0" i="0" u="none" strike="noStrike" cap="none">
+                <a:solidFill>
+                  <a:srgbClr val="0F172A"/>
+                </a:solidFill>
+                <a:latin typeface="Poppins SemiBold"/>
+                <a:ea typeface="Poppins SemiBold"/>
+                <a:cs typeface="Poppins SemiBold"/>
+                <a:sym typeface="Poppins SemiBold"/>
+              </a:rPr>
+              <a:t>Ambiente Resiliente</a:t>
+            </a:r>
+            <a:endParaRPr/>
+          </a:p>
+        </p:txBody>
+      </p:sp>
+      <p:sp>
+        <p:nvSpPr>
+          <p:cNvPr id="25" name="Google Shape;176;p17">
+            <a:extLst>
+              <a:ext uri="{FF2B5EF4-FFF2-40B4-BE49-F238E27FC236}">
+                <a16:creationId xmlns:a16="http://schemas.microsoft.com/office/drawing/2014/main" id="{293344E0-1C88-4131-9A6D-3C036E413C97}"/>
+              </a:ext>
+            </a:extLst>
+          </p:cNvPr>
+          <p:cNvSpPr txBox="1"/>
+          <p:nvPr/>
+        </p:nvSpPr>
+        <p:spPr>
+          <a:xfrm>
+            <a:off x="5314950" y="1902618"/>
+            <a:ext cx="6115050" cy="588623"/>
+          </a:xfrm>
+          <a:prstGeom prst="rect">
+            <a:avLst/>
+          </a:prstGeom>
+          <a:noFill/>
+          <a:ln>
+            <a:noFill/>
+          </a:ln>
+        </p:spPr>
+        <p:txBody>
+          <a:bodyPr spcFirstLastPara="1" wrap="square" lIns="0" tIns="0" rIns="0" bIns="0" anchor="t" anchorCtr="0">
+            <a:spAutoFit/>
+          </a:bodyPr>
+          <a:lstStyle/>
+          <a:p>
+            <a:pPr marL="0" marR="0" lvl="0" indent="0" algn="l" rtl="0">
+              <a:lnSpc>
+                <a:spcPct val="149960"/>
+              </a:lnSpc>
+              <a:spcBef>
+                <a:spcPts val="0"/>
+              </a:spcBef>
+              <a:spcAft>
+                <a:spcPts val="0"/>
+              </a:spcAft>
+              <a:buNone/>
+            </a:pPr>
+            <a:r>
+              <a:rPr lang="en-US" sz="1275" b="0" i="0" u="none" strike="noStrike" cap="none" dirty="0" err="1">
+                <a:solidFill>
+                  <a:schemeClr val="bg1"/>
+                </a:solidFill>
+                <a:latin typeface="Lato"/>
+                <a:ea typeface="Lato"/>
+                <a:cs typeface="Lato"/>
+                <a:sym typeface="Lato"/>
+              </a:rPr>
+              <a:t>Decisões</a:t>
+            </a:r>
+            <a:r>
+              <a:rPr lang="en-US" sz="1275" b="0" i="0" u="none" strike="noStrike" cap="none" dirty="0">
+                <a:solidFill>
+                  <a:schemeClr val="bg1"/>
+                </a:solidFill>
+                <a:latin typeface="Lato"/>
+                <a:ea typeface="Lato"/>
+                <a:cs typeface="Lato"/>
+                <a:sym typeface="Lato"/>
+              </a:rPr>
+              <a:t> de </a:t>
+            </a:r>
+            <a:r>
+              <a:rPr lang="en-US" sz="1275" b="0" i="0" u="none" strike="noStrike" cap="none" dirty="0" err="1">
+                <a:solidFill>
+                  <a:schemeClr val="bg1"/>
+                </a:solidFill>
+                <a:latin typeface="Lato"/>
+                <a:ea typeface="Lato"/>
+                <a:cs typeface="Lato"/>
+                <a:sym typeface="Lato"/>
+              </a:rPr>
+              <a:t>engenharia</a:t>
+            </a:r>
+            <a:r>
+              <a:rPr lang="en-US" sz="1275" b="0" i="0" u="none" strike="noStrike" cap="none" dirty="0">
+                <a:solidFill>
+                  <a:schemeClr val="bg1"/>
+                </a:solidFill>
+                <a:latin typeface="Lato"/>
+                <a:ea typeface="Lato"/>
+                <a:cs typeface="Lato"/>
+                <a:sym typeface="Lato"/>
+              </a:rPr>
+              <a:t> </a:t>
+            </a:r>
+            <a:r>
+              <a:rPr lang="en-US" sz="1275" b="0" i="0" u="none" strike="noStrike" cap="none" dirty="0" err="1">
+                <a:solidFill>
+                  <a:schemeClr val="bg1"/>
+                </a:solidFill>
+                <a:latin typeface="Lato"/>
+                <a:ea typeface="Lato"/>
+                <a:cs typeface="Lato"/>
+                <a:sym typeface="Lato"/>
+              </a:rPr>
+              <a:t>pensadas</a:t>
+            </a:r>
+            <a:r>
+              <a:rPr lang="en-US" sz="1275" b="0" i="0" u="none" strike="noStrike" cap="none" dirty="0">
+                <a:solidFill>
+                  <a:schemeClr val="bg1"/>
+                </a:solidFill>
+                <a:latin typeface="Lato"/>
+                <a:ea typeface="Lato"/>
+                <a:cs typeface="Lato"/>
+                <a:sym typeface="Lato"/>
+              </a:rPr>
+              <a:t> para </a:t>
+            </a:r>
+            <a:r>
+              <a:rPr lang="en-US" sz="1275" b="0" i="0" u="none" strike="noStrike" cap="none" dirty="0" err="1">
+                <a:solidFill>
+                  <a:schemeClr val="bg1"/>
+                </a:solidFill>
+                <a:latin typeface="Lato"/>
+                <a:ea typeface="Lato"/>
+                <a:cs typeface="Lato"/>
+                <a:sym typeface="Lato"/>
+              </a:rPr>
+              <a:t>manter</a:t>
+            </a:r>
+            <a:r>
+              <a:rPr lang="en-US" sz="1275" b="0" i="0" u="none" strike="noStrike" cap="none" dirty="0">
+                <a:solidFill>
+                  <a:schemeClr val="bg1"/>
+                </a:solidFill>
+                <a:latin typeface="Lato"/>
+                <a:ea typeface="Lato"/>
+                <a:cs typeface="Lato"/>
+                <a:sym typeface="Lato"/>
+              </a:rPr>
+              <a:t> a </a:t>
+            </a:r>
+            <a:r>
+              <a:rPr lang="en-US" sz="1275" b="0" i="0" u="none" strike="noStrike" cap="none" dirty="0" err="1">
+                <a:solidFill>
+                  <a:schemeClr val="bg1"/>
+                </a:solidFill>
+                <a:latin typeface="Lato"/>
+                <a:ea typeface="Lato"/>
+                <a:cs typeface="Lato"/>
+                <a:sym typeface="Lato"/>
+              </a:rPr>
+              <a:t>operação</a:t>
+            </a:r>
+            <a:r>
+              <a:rPr lang="en-US" sz="1275" b="0" i="0" u="none" strike="noStrike" cap="none" dirty="0">
+                <a:solidFill>
+                  <a:schemeClr val="bg1"/>
+                </a:solidFill>
+                <a:latin typeface="Lato"/>
+                <a:ea typeface="Lato"/>
+                <a:cs typeface="Lato"/>
+                <a:sym typeface="Lato"/>
+              </a:rPr>
+              <a:t> </a:t>
+            </a:r>
+            <a:r>
+              <a:rPr lang="en-US" sz="1275" b="0" i="0" u="none" strike="noStrike" cap="none" dirty="0" err="1">
+                <a:solidFill>
+                  <a:schemeClr val="bg1"/>
+                </a:solidFill>
+                <a:latin typeface="Lato"/>
+                <a:ea typeface="Lato"/>
+                <a:cs typeface="Lato"/>
+                <a:sym typeface="Lato"/>
+              </a:rPr>
+              <a:t>rodoviária</a:t>
+            </a:r>
+            <a:r>
+              <a:rPr lang="en-US" sz="1275" b="0" i="0" u="none" strike="noStrike" cap="none" dirty="0">
+                <a:solidFill>
+                  <a:schemeClr val="bg1"/>
+                </a:solidFill>
+                <a:latin typeface="Lato"/>
+                <a:ea typeface="Lato"/>
+                <a:cs typeface="Lato"/>
+                <a:sym typeface="Lato"/>
+              </a:rPr>
+              <a:t> </a:t>
+            </a:r>
+            <a:r>
+              <a:rPr lang="en-US" sz="1275" b="0" i="0" u="none" strike="noStrike" cap="none" dirty="0" err="1">
+                <a:solidFill>
+                  <a:schemeClr val="bg1"/>
+                </a:solidFill>
+                <a:latin typeface="Lato"/>
+                <a:ea typeface="Lato"/>
+                <a:cs typeface="Lato"/>
+                <a:sym typeface="Lato"/>
+              </a:rPr>
+              <a:t>rodando</a:t>
+            </a:r>
+            <a:r>
+              <a:rPr lang="en-US" sz="1275" b="0" i="0" u="none" strike="noStrike" cap="none" dirty="0">
+                <a:solidFill>
+                  <a:schemeClr val="bg1"/>
+                </a:solidFill>
+                <a:latin typeface="Lato"/>
+                <a:ea typeface="Lato"/>
+                <a:cs typeface="Lato"/>
+                <a:sym typeface="Lato"/>
+              </a:rPr>
+              <a:t> </a:t>
+            </a:r>
+            <a:r>
+              <a:rPr lang="en-US" sz="1275" b="0" i="0" u="none" strike="noStrike" cap="none" dirty="0" err="1">
+                <a:solidFill>
+                  <a:schemeClr val="bg1"/>
+                </a:solidFill>
+                <a:latin typeface="Lato"/>
+                <a:ea typeface="Lato"/>
+                <a:cs typeface="Lato"/>
+                <a:sym typeface="Lato"/>
+              </a:rPr>
+              <a:t>ininterruptamente</a:t>
+            </a:r>
+            <a:r>
+              <a:rPr lang="en-US" sz="1275" b="0" i="0" u="none" strike="noStrike" cap="none" dirty="0">
+                <a:solidFill>
+                  <a:schemeClr val="bg1"/>
+                </a:solidFill>
+                <a:latin typeface="Lato"/>
+                <a:ea typeface="Lato"/>
+                <a:cs typeface="Lato"/>
+                <a:sym typeface="Lato"/>
+              </a:rPr>
+              <a:t>, com </a:t>
+            </a:r>
+            <a:r>
+              <a:rPr lang="en-US" sz="1275" b="0" i="0" u="none" strike="noStrike" cap="none" dirty="0" err="1">
+                <a:solidFill>
+                  <a:schemeClr val="bg1"/>
+                </a:solidFill>
+                <a:latin typeface="Lato"/>
+                <a:ea typeface="Lato"/>
+                <a:cs typeface="Lato"/>
+                <a:sym typeface="Lato"/>
+              </a:rPr>
+              <a:t>controle</a:t>
+            </a:r>
+            <a:r>
+              <a:rPr lang="en-US" sz="1275" b="0" i="0" u="none" strike="noStrike" cap="none" dirty="0">
+                <a:solidFill>
+                  <a:schemeClr val="bg1"/>
+                </a:solidFill>
+                <a:latin typeface="Lato"/>
+                <a:ea typeface="Lato"/>
+                <a:cs typeface="Lato"/>
+                <a:sym typeface="Lato"/>
+              </a:rPr>
+              <a:t> </a:t>
+            </a:r>
+            <a:r>
+              <a:rPr lang="en-US" sz="1275" b="0" i="0" u="none" strike="noStrike" cap="none" dirty="0" err="1">
+                <a:solidFill>
+                  <a:schemeClr val="bg1"/>
+                </a:solidFill>
+                <a:latin typeface="Lato"/>
+                <a:ea typeface="Lato"/>
+                <a:cs typeface="Lato"/>
+                <a:sym typeface="Lato"/>
+              </a:rPr>
+              <a:t>rigoroso</a:t>
+            </a:r>
+            <a:r>
+              <a:rPr lang="en-US" sz="1275" b="0" i="0" u="none" strike="noStrike" cap="none" dirty="0">
+                <a:solidFill>
+                  <a:schemeClr val="bg1"/>
+                </a:solidFill>
+                <a:latin typeface="Lato"/>
+                <a:ea typeface="Lato"/>
+                <a:cs typeface="Lato"/>
+                <a:sym typeface="Lato"/>
+              </a:rPr>
+              <a:t> de custos:</a:t>
+            </a:r>
+            <a:endParaRPr dirty="0">
+              <a:solidFill>
+                <a:schemeClr val="bg1"/>
+              </a:solidFill>
+            </a:endParaRPr>
+          </a:p>
+        </p:txBody>
+      </p:sp>
+      <p:sp>
+        <p:nvSpPr>
+          <p:cNvPr id="26" name="Google Shape;178;p17">
+            <a:extLst>
+              <a:ext uri="{FF2B5EF4-FFF2-40B4-BE49-F238E27FC236}">
+                <a16:creationId xmlns:a16="http://schemas.microsoft.com/office/drawing/2014/main" id="{F69CEEB6-F6B1-479C-B760-1128C55CA27B}"/>
+              </a:ext>
+            </a:extLst>
+          </p:cNvPr>
+          <p:cNvSpPr txBox="1"/>
+          <p:nvPr/>
+        </p:nvSpPr>
+        <p:spPr>
+          <a:xfrm>
+            <a:off x="5648325" y="3488962"/>
+            <a:ext cx="5781675" cy="588623"/>
+          </a:xfrm>
+          <a:prstGeom prst="rect">
+            <a:avLst/>
+          </a:prstGeom>
+          <a:noFill/>
+          <a:ln>
+            <a:noFill/>
+          </a:ln>
+        </p:spPr>
+        <p:txBody>
+          <a:bodyPr spcFirstLastPara="1" wrap="square" lIns="0" tIns="0" rIns="0" bIns="0" anchor="t" anchorCtr="0">
+            <a:spAutoFit/>
+          </a:bodyPr>
+          <a:lstStyle/>
+          <a:p>
+            <a:pPr marL="0" marR="0" lvl="0" indent="0" algn="l" rtl="0">
+              <a:lnSpc>
+                <a:spcPct val="149960"/>
+              </a:lnSpc>
+              <a:spcBef>
+                <a:spcPts val="0"/>
+              </a:spcBef>
+              <a:spcAft>
+                <a:spcPts val="0"/>
+              </a:spcAft>
+              <a:buNone/>
+            </a:pPr>
+            <a:r>
+              <a:rPr lang="en-US" sz="1275" b="1" i="0" u="none" strike="noStrike" cap="none" dirty="0">
+                <a:solidFill>
+                  <a:schemeClr val="bg1"/>
+                </a:solidFill>
+                <a:latin typeface="Lato"/>
+                <a:ea typeface="Lato"/>
+                <a:cs typeface="Lato"/>
+                <a:sym typeface="Lato"/>
+              </a:rPr>
+              <a:t>OPEX </a:t>
+            </a:r>
+            <a:r>
+              <a:rPr lang="en-US" sz="1275" b="1" i="0" u="none" strike="noStrike" cap="none" dirty="0" err="1">
+                <a:solidFill>
+                  <a:schemeClr val="bg1"/>
+                </a:solidFill>
+                <a:latin typeface="Lato"/>
+                <a:ea typeface="Lato"/>
+                <a:cs typeface="Lato"/>
+                <a:sym typeface="Lato"/>
+              </a:rPr>
+              <a:t>Otimizado</a:t>
+            </a:r>
+            <a:r>
+              <a:rPr lang="en-US" sz="1275" b="1" i="0" u="none" strike="noStrike" cap="none" dirty="0">
+                <a:solidFill>
+                  <a:schemeClr val="bg1"/>
+                </a:solidFill>
+                <a:latin typeface="Lato"/>
+                <a:ea typeface="Lato"/>
+                <a:cs typeface="Lato"/>
+                <a:sym typeface="Lato"/>
+              </a:rPr>
+              <a:t>:</a:t>
+            </a:r>
+            <a:r>
+              <a:rPr lang="en-US" sz="1275" b="0" i="0" u="none" strike="noStrike" cap="none" dirty="0">
+                <a:solidFill>
+                  <a:schemeClr val="bg1"/>
+                </a:solidFill>
+                <a:latin typeface="Lato"/>
+                <a:ea typeface="Lato"/>
+                <a:cs typeface="Lato"/>
+                <a:sym typeface="Lato"/>
+              </a:rPr>
+              <a:t> </a:t>
+            </a:r>
+            <a:r>
+              <a:rPr lang="en-US" sz="1275" b="0" i="0" u="none" strike="noStrike" cap="none" dirty="0" err="1">
+                <a:solidFill>
+                  <a:schemeClr val="bg1"/>
+                </a:solidFill>
+                <a:latin typeface="Lato"/>
+                <a:ea typeface="Lato"/>
+                <a:cs typeface="Lato"/>
+                <a:sym typeface="Lato"/>
+              </a:rPr>
+              <a:t>Arquitetura</a:t>
+            </a:r>
+            <a:r>
+              <a:rPr lang="en-US" sz="1275" b="0" i="0" u="none" strike="noStrike" cap="none" dirty="0">
+                <a:solidFill>
+                  <a:schemeClr val="bg1"/>
+                </a:solidFill>
+                <a:latin typeface="Lato"/>
+                <a:ea typeface="Lato"/>
+                <a:cs typeface="Lato"/>
+                <a:sym typeface="Lato"/>
+              </a:rPr>
+              <a:t> Cloud </a:t>
+            </a:r>
+            <a:r>
+              <a:rPr lang="en-US" sz="1275" b="0" i="0" u="none" strike="noStrike" cap="none" dirty="0" err="1">
+                <a:solidFill>
+                  <a:schemeClr val="bg1"/>
+                </a:solidFill>
+                <a:latin typeface="Lato"/>
+                <a:ea typeface="Lato"/>
+                <a:cs typeface="Lato"/>
+                <a:sym typeface="Lato"/>
+              </a:rPr>
+              <a:t>escalável</a:t>
+            </a:r>
+            <a:r>
+              <a:rPr lang="en-US" sz="1275" b="0" i="0" u="none" strike="noStrike" cap="none" dirty="0">
+                <a:solidFill>
+                  <a:schemeClr val="bg1"/>
+                </a:solidFill>
+                <a:latin typeface="Lato"/>
+                <a:ea typeface="Lato"/>
+                <a:cs typeface="Lato"/>
+                <a:sym typeface="Lato"/>
+              </a:rPr>
+              <a:t> </a:t>
+            </a:r>
+            <a:r>
+              <a:rPr lang="en-US" sz="1275" b="0" i="0" u="none" strike="noStrike" cap="none" dirty="0" err="1">
+                <a:solidFill>
+                  <a:schemeClr val="bg1"/>
+                </a:solidFill>
+                <a:latin typeface="Lato"/>
+                <a:ea typeface="Lato"/>
+                <a:cs typeface="Lato"/>
+                <a:sym typeface="Lato"/>
+              </a:rPr>
+              <a:t>baseada</a:t>
+            </a:r>
+            <a:r>
+              <a:rPr lang="en-US" sz="1275" b="0" i="0" u="none" strike="noStrike" cap="none" dirty="0">
+                <a:solidFill>
+                  <a:schemeClr val="bg1"/>
+                </a:solidFill>
+                <a:latin typeface="Lato"/>
+                <a:ea typeface="Lato"/>
+                <a:cs typeface="Lato"/>
+                <a:sym typeface="Lato"/>
+              </a:rPr>
+              <a:t> </a:t>
+            </a:r>
+            <a:r>
+              <a:rPr lang="en-US" sz="1275" b="0" i="0" u="none" strike="noStrike" cap="none" dirty="0" err="1">
+                <a:solidFill>
+                  <a:schemeClr val="bg1"/>
+                </a:solidFill>
+                <a:latin typeface="Lato"/>
+                <a:ea typeface="Lato"/>
+                <a:cs typeface="Lato"/>
+                <a:sym typeface="Lato"/>
+              </a:rPr>
+              <a:t>em</a:t>
+            </a:r>
+            <a:r>
+              <a:rPr lang="en-US" sz="1275" b="0" i="0" u="none" strike="noStrike" cap="none" dirty="0">
+                <a:solidFill>
+                  <a:schemeClr val="bg1"/>
+                </a:solidFill>
+                <a:latin typeface="Lato"/>
+                <a:ea typeface="Lato"/>
+                <a:cs typeface="Lato"/>
+                <a:sym typeface="Lato"/>
+              </a:rPr>
+              <a:t> </a:t>
+            </a:r>
+            <a:r>
+              <a:rPr lang="en-US" sz="1275" b="0" i="0" u="none" strike="noStrike" cap="none" dirty="0" err="1">
+                <a:solidFill>
+                  <a:schemeClr val="bg1"/>
+                </a:solidFill>
+                <a:latin typeface="Lato"/>
+                <a:ea typeface="Lato"/>
+                <a:cs typeface="Lato"/>
+                <a:sym typeface="Lato"/>
+              </a:rPr>
+              <a:t>consumo</a:t>
+            </a:r>
+            <a:r>
+              <a:rPr lang="en-US" sz="1275" b="0" i="0" u="none" strike="noStrike" cap="none" dirty="0">
+                <a:solidFill>
+                  <a:schemeClr val="bg1"/>
+                </a:solidFill>
+                <a:latin typeface="Lato"/>
+                <a:ea typeface="Lato"/>
+                <a:cs typeface="Lato"/>
+                <a:sym typeface="Lato"/>
+              </a:rPr>
+              <a:t> sob </a:t>
+            </a:r>
+            <a:r>
+              <a:rPr lang="en-US" sz="1275" b="0" i="0" u="none" strike="noStrike" cap="none" dirty="0" err="1">
+                <a:solidFill>
+                  <a:schemeClr val="bg1"/>
+                </a:solidFill>
+                <a:latin typeface="Lato"/>
+                <a:ea typeface="Lato"/>
+                <a:cs typeface="Lato"/>
+                <a:sym typeface="Lato"/>
+              </a:rPr>
+              <a:t>demanda</a:t>
+            </a:r>
+            <a:r>
+              <a:rPr lang="en-US" sz="1275" b="0" i="0" u="none" strike="noStrike" cap="none" dirty="0">
+                <a:solidFill>
+                  <a:schemeClr val="bg1"/>
+                </a:solidFill>
+                <a:latin typeface="Lato"/>
+                <a:ea typeface="Lato"/>
+                <a:cs typeface="Lato"/>
+                <a:sym typeface="Lato"/>
+              </a:rPr>
+              <a:t>, </a:t>
+            </a:r>
+            <a:r>
+              <a:rPr lang="en-US" sz="1275" b="0" i="0" u="none" strike="noStrike" cap="none" dirty="0" err="1">
+                <a:solidFill>
+                  <a:schemeClr val="bg1"/>
+                </a:solidFill>
+                <a:latin typeface="Lato"/>
+                <a:ea typeface="Lato"/>
+                <a:cs typeface="Lato"/>
+                <a:sym typeface="Lato"/>
+              </a:rPr>
+              <a:t>orçada</a:t>
+            </a:r>
+            <a:r>
+              <a:rPr lang="en-US" sz="1275" b="0" i="0" u="none" strike="noStrike" cap="none" dirty="0">
+                <a:solidFill>
+                  <a:schemeClr val="bg1"/>
+                </a:solidFill>
+                <a:latin typeface="Lato"/>
+                <a:ea typeface="Lato"/>
+                <a:cs typeface="Lato"/>
+                <a:sym typeface="Lato"/>
+              </a:rPr>
+              <a:t> </a:t>
+            </a:r>
+            <a:r>
+              <a:rPr lang="en-US" sz="1275" b="0" i="0" u="none" strike="noStrike" cap="none" dirty="0" err="1">
+                <a:solidFill>
+                  <a:schemeClr val="bg1"/>
+                </a:solidFill>
+                <a:latin typeface="Lato"/>
+                <a:ea typeface="Lato"/>
+                <a:cs typeface="Lato"/>
+                <a:sym typeface="Lato"/>
+              </a:rPr>
+              <a:t>em</a:t>
+            </a:r>
+            <a:r>
+              <a:rPr lang="en-US" sz="1275" b="0" i="0" u="none" strike="noStrike" cap="none" dirty="0">
+                <a:solidFill>
+                  <a:schemeClr val="bg1"/>
+                </a:solidFill>
+                <a:latin typeface="Lato"/>
+                <a:ea typeface="Lato"/>
+                <a:cs typeface="Lato"/>
+                <a:sym typeface="Lato"/>
+              </a:rPr>
+              <a:t> </a:t>
+            </a:r>
+            <a:r>
+              <a:rPr lang="en-US" sz="1275" b="0" i="0" u="none" strike="noStrike" cap="none" dirty="0" err="1">
+                <a:solidFill>
+                  <a:schemeClr val="bg1"/>
+                </a:solidFill>
+                <a:latin typeface="Lato"/>
+                <a:ea typeface="Lato"/>
+                <a:cs typeface="Lato"/>
+                <a:sym typeface="Lato"/>
+              </a:rPr>
+              <a:t>apenas</a:t>
+            </a:r>
+            <a:r>
+              <a:rPr lang="en-US" sz="1275" b="0" i="0" u="none" strike="noStrike" cap="none" dirty="0">
+                <a:solidFill>
+                  <a:schemeClr val="bg1"/>
+                </a:solidFill>
+                <a:latin typeface="Lato"/>
+                <a:ea typeface="Lato"/>
+                <a:cs typeface="Lato"/>
+                <a:sym typeface="Lato"/>
+              </a:rPr>
+              <a:t> </a:t>
+            </a:r>
+            <a:r>
+              <a:rPr lang="en-US" sz="1275" b="1" i="0" u="none" strike="noStrike" cap="none" dirty="0">
+                <a:solidFill>
+                  <a:schemeClr val="bg1"/>
+                </a:solidFill>
+                <a:latin typeface="Lato"/>
+                <a:ea typeface="Lato"/>
+                <a:cs typeface="Lato"/>
+                <a:sym typeface="Lato"/>
+              </a:rPr>
+              <a:t>R$ 200,00/</a:t>
+            </a:r>
+            <a:r>
+              <a:rPr lang="en-US" sz="1275" b="1" i="0" u="none" strike="noStrike" cap="none" dirty="0" err="1">
+                <a:solidFill>
+                  <a:schemeClr val="bg1"/>
+                </a:solidFill>
+                <a:latin typeface="Lato"/>
+                <a:ea typeface="Lato"/>
+                <a:cs typeface="Lato"/>
+                <a:sym typeface="Lato"/>
+              </a:rPr>
+              <a:t>mês</a:t>
+            </a:r>
+            <a:r>
+              <a:rPr lang="en-US" sz="1275" b="0" i="0" u="none" strike="noStrike" cap="none" dirty="0">
+                <a:solidFill>
+                  <a:schemeClr val="bg1"/>
+                </a:solidFill>
+                <a:latin typeface="Lato"/>
+                <a:ea typeface="Lato"/>
+                <a:cs typeface="Lato"/>
+                <a:sym typeface="Lato"/>
+              </a:rPr>
+              <a:t>.</a:t>
+            </a:r>
+            <a:endParaRPr dirty="0">
+              <a:solidFill>
+                <a:schemeClr val="bg1"/>
+              </a:solidFill>
+            </a:endParaRPr>
+          </a:p>
+        </p:txBody>
+      </p:sp>
+      <p:sp>
+        <p:nvSpPr>
+          <p:cNvPr id="27" name="Google Shape;180;p17">
+            <a:extLst>
+              <a:ext uri="{FF2B5EF4-FFF2-40B4-BE49-F238E27FC236}">
+                <a16:creationId xmlns:a16="http://schemas.microsoft.com/office/drawing/2014/main" id="{C3E107F9-F610-4720-9C35-F7639B94919C}"/>
+              </a:ext>
+            </a:extLst>
+          </p:cNvPr>
+          <p:cNvSpPr txBox="1"/>
+          <p:nvPr/>
+        </p:nvSpPr>
+        <p:spPr>
+          <a:xfrm>
+            <a:off x="5648325" y="4983956"/>
+            <a:ext cx="5781675" cy="588623"/>
+          </a:xfrm>
+          <a:prstGeom prst="rect">
+            <a:avLst/>
+          </a:prstGeom>
+          <a:noFill/>
+          <a:ln>
+            <a:noFill/>
+          </a:ln>
+        </p:spPr>
+        <p:txBody>
+          <a:bodyPr spcFirstLastPara="1" wrap="square" lIns="0" tIns="0" rIns="0" bIns="0" anchor="t" anchorCtr="0">
+            <a:spAutoFit/>
+          </a:bodyPr>
+          <a:lstStyle/>
+          <a:p>
+            <a:pPr marL="0" marR="0" lvl="0" indent="0" algn="l" rtl="0">
+              <a:lnSpc>
+                <a:spcPct val="149960"/>
+              </a:lnSpc>
+              <a:spcBef>
+                <a:spcPts val="0"/>
+              </a:spcBef>
+              <a:spcAft>
+                <a:spcPts val="0"/>
+              </a:spcAft>
+              <a:buNone/>
+            </a:pPr>
+            <a:r>
+              <a:rPr lang="pt-BR" sz="1275" b="1" i="0" u="none" strike="noStrike" cap="none" dirty="0">
+                <a:solidFill>
+                  <a:schemeClr val="bg1"/>
+                </a:solidFill>
+                <a:latin typeface="Lato"/>
+                <a:ea typeface="Lato"/>
+                <a:cs typeface="Lato"/>
+                <a:sym typeface="Lato"/>
+              </a:rPr>
+              <a:t>Reserva de Escopo:</a:t>
+            </a:r>
+            <a:r>
+              <a:rPr lang="pt-BR" sz="1275" b="0" i="0" u="none" strike="noStrike" cap="none" dirty="0">
+                <a:solidFill>
+                  <a:schemeClr val="bg1"/>
+                </a:solidFill>
+                <a:latin typeface="Lato"/>
+                <a:ea typeface="Lato"/>
+                <a:cs typeface="Lato"/>
+                <a:sym typeface="Lato"/>
+              </a:rPr>
+              <a:t> Contingência técnica de </a:t>
+            </a:r>
+            <a:r>
+              <a:rPr lang="pt-BR" sz="1275" b="1" i="0" u="none" strike="noStrike" cap="none" dirty="0">
+                <a:solidFill>
+                  <a:schemeClr val="bg1"/>
+                </a:solidFill>
+                <a:latin typeface="Lato"/>
+                <a:ea typeface="Lato"/>
+                <a:cs typeface="Lato"/>
+                <a:sym typeface="Lato"/>
+              </a:rPr>
+              <a:t>R$ 5.320,00</a:t>
+            </a:r>
+            <a:r>
+              <a:rPr lang="pt-BR" sz="1275" b="0" i="0" u="none" strike="noStrike" cap="none" dirty="0">
+                <a:solidFill>
+                  <a:schemeClr val="bg1"/>
+                </a:solidFill>
+                <a:latin typeface="Lato"/>
+                <a:ea typeface="Lato"/>
+                <a:cs typeface="Lato"/>
+                <a:sym typeface="Lato"/>
+              </a:rPr>
+              <a:t> provisionada no orçamento inicial de desenvolvimento.</a:t>
+            </a:r>
+            <a:endParaRPr lang="pt-BR" sz="1200" dirty="0">
+              <a:solidFill>
+                <a:schemeClr val="bg1"/>
+              </a:solidFill>
+            </a:endParaRPr>
+          </a:p>
+        </p:txBody>
+      </p:sp>
+      <p:pic>
+        <p:nvPicPr>
+          <p:cNvPr id="29" name="Google Shape;177;p17" descr="image.png">
+            <a:extLst>
+              <a:ext uri="{FF2B5EF4-FFF2-40B4-BE49-F238E27FC236}">
+                <a16:creationId xmlns:a16="http://schemas.microsoft.com/office/drawing/2014/main" id="{24464D7B-DB09-4EEF-A325-5E0D8FFE9FAD}"/>
+              </a:ext>
+            </a:extLst>
+          </p:cNvPr>
+          <p:cNvPicPr preferRelativeResize="0"/>
+          <p:nvPr/>
+        </p:nvPicPr>
+        <p:blipFill rotWithShape="1">
+          <a:blip r:embed="rId4">
+            <a:alphaModFix/>
+          </a:blip>
+          <a:srcRect/>
+          <a:stretch/>
+        </p:blipFill>
+        <p:spPr>
+          <a:xfrm>
+            <a:off x="1143000" y="2185987"/>
+            <a:ext cx="3314700" cy="3314700"/>
+          </a:xfrm>
+          <a:prstGeom prst="rect">
+            <a:avLst/>
+          </a:prstGeom>
+          <a:noFill/>
+          <a:ln>
+            <a:noFill/>
+          </a:ln>
+        </p:spPr>
+      </p:pic>
+    </p:spTree>
+    <p:extLst>
+      <p:ext uri="{BB962C8B-B14F-4D97-AF65-F5344CB8AC3E}">
+        <p14:creationId xmlns:p14="http://schemas.microsoft.com/office/powerpoint/2010/main" val="3373011535"/>
+      </p:ext>
+    </p:extLst>
+  </p:cSld>
+  <p:clrMapOvr>
+    <a:masterClrMapping/>
+  </p:clrMapOvr>
+</p:sld>
+</file>
+
+<file path=ppt/slides/slide5.xml><?xml version="1.0" encoding="utf-8"?>
+<p:sld xmlns:a="http://schemas.openxmlformats.org/drawingml/2006/main" xmlns:r="http://schemas.openxmlformats.org/officeDocument/2006/relationships" xmlns:p="http://schemas.openxmlformats.org/presentationml/2006/main">
+  <p:cSld>
     <p:bg>
       <p:bgPr>
         <a:solidFill>
@@ -19286,7 +19975,7 @@
 </p:sld>
 </file>
 
-<file path=ppt/slides/slide5.xml><?xml version="1.0" encoding="utf-8"?>
+<file path=ppt/slides/slide6.xml><?xml version="1.0" encoding="utf-8"?>
 <p:sld xmlns:a="http://schemas.openxmlformats.org/drawingml/2006/main" xmlns:r="http://schemas.openxmlformats.org/officeDocument/2006/relationships" xmlns:p="http://schemas.openxmlformats.org/presentationml/2006/main">
   <p:cSld>
     <p:bg>
@@ -22185,1037 +22874,6 @@
 </p:sld>
 </file>
 
-<file path=ppt/slides/slide6.xml><?xml version="1.0" encoding="utf-8"?>
-<p:sld xmlns:a="http://schemas.openxmlformats.org/drawingml/2006/main" xmlns:r="http://schemas.openxmlformats.org/officeDocument/2006/relationships" xmlns:p="http://schemas.openxmlformats.org/presentationml/2006/main">
-  <p:cSld>
-    <p:spTree>
-      <p:nvGrpSpPr>
-        <p:cNvPr id="1" name="Shape 164"/>
-        <p:cNvGrpSpPr/>
-        <p:nvPr/>
-      </p:nvGrpSpPr>
-      <p:grpSpPr>
-        <a:xfrm>
-          <a:off x="0" y="0"/>
-          <a:ext cx="0" cy="0"/>
-          <a:chOff x="0" y="0"/>
-          <a:chExt cx="0" cy="0"/>
-        </a:xfrm>
-      </p:grpSpPr>
-      <p:pic>
-        <p:nvPicPr>
-          <p:cNvPr id="165" name="Google Shape;165;p5" descr="image.png"/>
-          <p:cNvPicPr preferRelativeResize="0"/>
-          <p:nvPr/>
-        </p:nvPicPr>
-        <p:blipFill rotWithShape="1">
-          <a:blip r:embed="rId3">
-            <a:alphaModFix/>
-          </a:blip>
-          <a:srcRect/>
-          <a:stretch/>
-        </p:blipFill>
-        <p:spPr>
-          <a:xfrm>
-            <a:off x="0" y="0"/>
-            <a:ext cx="12192000" cy="6858000"/>
-          </a:xfrm>
-          <a:prstGeom prst="rect">
-            <a:avLst/>
-          </a:prstGeom>
-          <a:noFill/>
-          <a:ln>
-            <a:noFill/>
-          </a:ln>
-        </p:spPr>
-      </p:pic>
-      <p:sp>
-        <p:nvSpPr>
-          <p:cNvPr id="166" name="Google Shape;166;p5"/>
-          <p:cNvSpPr txBox="1"/>
-          <p:nvPr/>
-        </p:nvSpPr>
-        <p:spPr>
-          <a:xfrm>
-            <a:off x="981635" y="638174"/>
-            <a:ext cx="11658600" cy="914096"/>
-          </a:xfrm>
-          <a:prstGeom prst="rect">
-            <a:avLst/>
-          </a:prstGeom>
-          <a:noFill/>
-          <a:ln>
-            <a:noFill/>
-          </a:ln>
-        </p:spPr>
-        <p:txBody>
-          <a:bodyPr spcFirstLastPara="1" wrap="square" lIns="0" tIns="0" rIns="0" bIns="0" anchor="t" anchorCtr="0">
-            <a:spAutoFit/>
-          </a:bodyPr>
-          <a:lstStyle/>
-          <a:p>
-            <a:pPr>
-              <a:lnSpc>
-                <a:spcPct val="110000"/>
-              </a:lnSpc>
-              <a:buSzPts val="3900"/>
-            </a:pPr>
-            <a:r>
-              <a:rPr lang="pt-BR" sz="4000" b="1" i="0" u="none" strike="noStrike" cap="none" dirty="0">
-                <a:solidFill>
-                  <a:schemeClr val="bg1"/>
-                </a:solidFill>
-                <a:latin typeface="Poppins"/>
-                <a:ea typeface="Poppins"/>
-                <a:cs typeface="Poppins"/>
-                <a:sym typeface="Poppins"/>
-              </a:rPr>
-              <a:t>Infraestrutura Cloud &amp; Análise de </a:t>
-            </a:r>
-            <a:r>
-              <a:rPr lang="pt-BR" sz="4000" b="1" i="0" u="none" strike="noStrike" cap="none" dirty="0">
-                <a:solidFill>
-                  <a:srgbClr val="2DD4BF"/>
-                </a:solidFill>
-                <a:latin typeface="Poppins"/>
-                <a:ea typeface="Poppins"/>
-                <a:cs typeface="Poppins"/>
-                <a:sym typeface="Poppins"/>
-              </a:rPr>
-              <a:t>Riscos</a:t>
-            </a:r>
-            <a:endParaRPr lang="pt-BR" sz="4000" dirty="0">
-              <a:solidFill>
-                <a:srgbClr val="2DD4BF"/>
-              </a:solidFill>
-            </a:endParaRPr>
-          </a:p>
-          <a:p>
-            <a:pPr marL="0" marR="0" lvl="0" indent="0" algn="l" rtl="0">
-              <a:lnSpc>
-                <a:spcPct val="110000"/>
-              </a:lnSpc>
-              <a:spcBef>
-                <a:spcPts val="0"/>
-              </a:spcBef>
-              <a:spcAft>
-                <a:spcPts val="0"/>
-              </a:spcAft>
-              <a:buClr>
-                <a:srgbClr val="000000"/>
-              </a:buClr>
-              <a:buSzPts val="3900"/>
-              <a:buFont typeface="Arial"/>
-              <a:buNone/>
-            </a:pPr>
-            <a:endParaRPr sz="1400" b="0" i="0" u="none" strike="noStrike" cap="none" dirty="0">
-              <a:latin typeface="Arial"/>
-              <a:ea typeface="Arial"/>
-              <a:cs typeface="Arial"/>
-              <a:sym typeface="Arial"/>
-            </a:endParaRPr>
-          </a:p>
-        </p:txBody>
-      </p:sp>
-      <p:sp>
-        <p:nvSpPr>
-          <p:cNvPr id="167" name="Google Shape;167;p5"/>
-          <p:cNvSpPr/>
-          <p:nvPr/>
-        </p:nvSpPr>
-        <p:spPr>
-          <a:xfrm>
-            <a:off x="762000" y="762000"/>
-            <a:ext cx="76200" cy="544710"/>
-          </a:xfrm>
-          <a:prstGeom prst="rect">
-            <a:avLst/>
-          </a:prstGeom>
-          <a:solidFill>
-            <a:srgbClr val="2DD4BF"/>
-          </a:solidFill>
-          <a:ln>
-            <a:noFill/>
-          </a:ln>
-        </p:spPr>
-        <p:txBody>
-          <a:bodyPr spcFirstLastPara="1" wrap="square" lIns="91425" tIns="45700" rIns="91425" bIns="45700" anchor="ctr" anchorCtr="0">
-            <a:noAutofit/>
-          </a:bodyPr>
-          <a:lstStyle/>
-          <a:p>
-            <a:pPr marL="0" marR="0" lvl="0" indent="0" algn="ctr" rtl="0">
-              <a:lnSpc>
-                <a:spcPct val="100000"/>
-              </a:lnSpc>
-              <a:spcBef>
-                <a:spcPts val="0"/>
-              </a:spcBef>
-              <a:spcAft>
-                <a:spcPts val="0"/>
-              </a:spcAft>
-              <a:buClr>
-                <a:srgbClr val="000000"/>
-              </a:buClr>
-              <a:buSzPts val="1800"/>
-              <a:buFont typeface="Arial"/>
-              <a:buNone/>
-            </a:pPr>
-            <a:endParaRPr sz="1800" b="0" i="0" u="none" strike="noStrike" cap="none">
-              <a:solidFill>
-                <a:schemeClr val="dk1"/>
-              </a:solidFill>
-              <a:latin typeface="Calibri"/>
-              <a:ea typeface="Calibri"/>
-              <a:cs typeface="Calibri"/>
-              <a:sym typeface="Calibri"/>
-            </a:endParaRPr>
-          </a:p>
-        </p:txBody>
-      </p:sp>
-      <p:sp>
-        <p:nvSpPr>
-          <p:cNvPr id="24" name="Google Shape;175;p17">
-            <a:extLst>
-              <a:ext uri="{FF2B5EF4-FFF2-40B4-BE49-F238E27FC236}">
-                <a16:creationId xmlns:a16="http://schemas.microsoft.com/office/drawing/2014/main" id="{4FADEB63-683E-4702-99A8-50AC58166333}"/>
-              </a:ext>
-            </a:extLst>
-          </p:cNvPr>
-          <p:cNvSpPr txBox="1"/>
-          <p:nvPr/>
-        </p:nvSpPr>
-        <p:spPr>
-          <a:xfrm>
-            <a:off x="5314950" y="1435893"/>
-            <a:ext cx="6420802" cy="371475"/>
-          </a:xfrm>
-          <a:prstGeom prst="rect">
-            <a:avLst/>
-          </a:prstGeom>
-          <a:noFill/>
-          <a:ln>
-            <a:noFill/>
-          </a:ln>
-        </p:spPr>
-        <p:txBody>
-          <a:bodyPr spcFirstLastPara="1" wrap="square" lIns="0" tIns="0" rIns="0" bIns="0" anchor="t" anchorCtr="0">
-            <a:spAutoFit/>
-          </a:bodyPr>
-          <a:lstStyle/>
-          <a:p>
-            <a:pPr marL="0" marR="0" lvl="0" indent="0" algn="l" rtl="0">
-              <a:spcBef>
-                <a:spcPts val="0"/>
-              </a:spcBef>
-              <a:spcAft>
-                <a:spcPts val="0"/>
-              </a:spcAft>
-              <a:buNone/>
-            </a:pPr>
-            <a:r>
-              <a:rPr lang="en-US" sz="1950" b="0" i="0" u="none" strike="noStrike" cap="none">
-                <a:solidFill>
-                  <a:srgbClr val="0F172A"/>
-                </a:solidFill>
-                <a:latin typeface="Poppins SemiBold"/>
-                <a:ea typeface="Poppins SemiBold"/>
-                <a:cs typeface="Poppins SemiBold"/>
-                <a:sym typeface="Poppins SemiBold"/>
-              </a:rPr>
-              <a:t>Ambiente Resiliente</a:t>
-            </a:r>
-            <a:endParaRPr/>
-          </a:p>
-        </p:txBody>
-      </p:sp>
-      <p:sp>
-        <p:nvSpPr>
-          <p:cNvPr id="25" name="Google Shape;176;p17">
-            <a:extLst>
-              <a:ext uri="{FF2B5EF4-FFF2-40B4-BE49-F238E27FC236}">
-                <a16:creationId xmlns:a16="http://schemas.microsoft.com/office/drawing/2014/main" id="{293344E0-1C88-4131-9A6D-3C036E413C97}"/>
-              </a:ext>
-            </a:extLst>
-          </p:cNvPr>
-          <p:cNvSpPr txBox="1"/>
-          <p:nvPr/>
-        </p:nvSpPr>
-        <p:spPr>
-          <a:xfrm>
-            <a:off x="5314950" y="1902618"/>
-            <a:ext cx="6115050" cy="588623"/>
-          </a:xfrm>
-          <a:prstGeom prst="rect">
-            <a:avLst/>
-          </a:prstGeom>
-          <a:noFill/>
-          <a:ln>
-            <a:noFill/>
-          </a:ln>
-        </p:spPr>
-        <p:txBody>
-          <a:bodyPr spcFirstLastPara="1" wrap="square" lIns="0" tIns="0" rIns="0" bIns="0" anchor="t" anchorCtr="0">
-            <a:spAutoFit/>
-          </a:bodyPr>
-          <a:lstStyle/>
-          <a:p>
-            <a:pPr marL="0" marR="0" lvl="0" indent="0" algn="l" rtl="0">
-              <a:lnSpc>
-                <a:spcPct val="149960"/>
-              </a:lnSpc>
-              <a:spcBef>
-                <a:spcPts val="0"/>
-              </a:spcBef>
-              <a:spcAft>
-                <a:spcPts val="0"/>
-              </a:spcAft>
-              <a:buNone/>
-            </a:pPr>
-            <a:r>
-              <a:rPr lang="en-US" sz="1275" b="0" i="0" u="none" strike="noStrike" cap="none" dirty="0" err="1">
-                <a:solidFill>
-                  <a:schemeClr val="bg1"/>
-                </a:solidFill>
-                <a:latin typeface="Lato"/>
-                <a:ea typeface="Lato"/>
-                <a:cs typeface="Lato"/>
-                <a:sym typeface="Lato"/>
-              </a:rPr>
-              <a:t>Decisões</a:t>
-            </a:r>
-            <a:r>
-              <a:rPr lang="en-US" sz="1275" b="0" i="0" u="none" strike="noStrike" cap="none" dirty="0">
-                <a:solidFill>
-                  <a:schemeClr val="bg1"/>
-                </a:solidFill>
-                <a:latin typeface="Lato"/>
-                <a:ea typeface="Lato"/>
-                <a:cs typeface="Lato"/>
-                <a:sym typeface="Lato"/>
-              </a:rPr>
-              <a:t> de </a:t>
-            </a:r>
-            <a:r>
-              <a:rPr lang="en-US" sz="1275" b="0" i="0" u="none" strike="noStrike" cap="none" dirty="0" err="1">
-                <a:solidFill>
-                  <a:schemeClr val="bg1"/>
-                </a:solidFill>
-                <a:latin typeface="Lato"/>
-                <a:ea typeface="Lato"/>
-                <a:cs typeface="Lato"/>
-                <a:sym typeface="Lato"/>
-              </a:rPr>
-              <a:t>engenharia</a:t>
-            </a:r>
-            <a:r>
-              <a:rPr lang="en-US" sz="1275" b="0" i="0" u="none" strike="noStrike" cap="none" dirty="0">
-                <a:solidFill>
-                  <a:schemeClr val="bg1"/>
-                </a:solidFill>
-                <a:latin typeface="Lato"/>
-                <a:ea typeface="Lato"/>
-                <a:cs typeface="Lato"/>
-                <a:sym typeface="Lato"/>
-              </a:rPr>
-              <a:t> </a:t>
-            </a:r>
-            <a:r>
-              <a:rPr lang="en-US" sz="1275" b="0" i="0" u="none" strike="noStrike" cap="none" dirty="0" err="1">
-                <a:solidFill>
-                  <a:schemeClr val="bg1"/>
-                </a:solidFill>
-                <a:latin typeface="Lato"/>
-                <a:ea typeface="Lato"/>
-                <a:cs typeface="Lato"/>
-                <a:sym typeface="Lato"/>
-              </a:rPr>
-              <a:t>pensadas</a:t>
-            </a:r>
-            <a:r>
-              <a:rPr lang="en-US" sz="1275" b="0" i="0" u="none" strike="noStrike" cap="none" dirty="0">
-                <a:solidFill>
-                  <a:schemeClr val="bg1"/>
-                </a:solidFill>
-                <a:latin typeface="Lato"/>
-                <a:ea typeface="Lato"/>
-                <a:cs typeface="Lato"/>
-                <a:sym typeface="Lato"/>
-              </a:rPr>
-              <a:t> para </a:t>
-            </a:r>
-            <a:r>
-              <a:rPr lang="en-US" sz="1275" b="0" i="0" u="none" strike="noStrike" cap="none" dirty="0" err="1">
-                <a:solidFill>
-                  <a:schemeClr val="bg1"/>
-                </a:solidFill>
-                <a:latin typeface="Lato"/>
-                <a:ea typeface="Lato"/>
-                <a:cs typeface="Lato"/>
-                <a:sym typeface="Lato"/>
-              </a:rPr>
-              <a:t>manter</a:t>
-            </a:r>
-            <a:r>
-              <a:rPr lang="en-US" sz="1275" b="0" i="0" u="none" strike="noStrike" cap="none" dirty="0">
-                <a:solidFill>
-                  <a:schemeClr val="bg1"/>
-                </a:solidFill>
-                <a:latin typeface="Lato"/>
-                <a:ea typeface="Lato"/>
-                <a:cs typeface="Lato"/>
-                <a:sym typeface="Lato"/>
-              </a:rPr>
-              <a:t> a </a:t>
-            </a:r>
-            <a:r>
-              <a:rPr lang="en-US" sz="1275" b="0" i="0" u="none" strike="noStrike" cap="none" dirty="0" err="1">
-                <a:solidFill>
-                  <a:schemeClr val="bg1"/>
-                </a:solidFill>
-                <a:latin typeface="Lato"/>
-                <a:ea typeface="Lato"/>
-                <a:cs typeface="Lato"/>
-                <a:sym typeface="Lato"/>
-              </a:rPr>
-              <a:t>operação</a:t>
-            </a:r>
-            <a:r>
-              <a:rPr lang="en-US" sz="1275" b="0" i="0" u="none" strike="noStrike" cap="none" dirty="0">
-                <a:solidFill>
-                  <a:schemeClr val="bg1"/>
-                </a:solidFill>
-                <a:latin typeface="Lato"/>
-                <a:ea typeface="Lato"/>
-                <a:cs typeface="Lato"/>
-                <a:sym typeface="Lato"/>
-              </a:rPr>
-              <a:t> </a:t>
-            </a:r>
-            <a:r>
-              <a:rPr lang="en-US" sz="1275" b="0" i="0" u="none" strike="noStrike" cap="none" dirty="0" err="1">
-                <a:solidFill>
-                  <a:schemeClr val="bg1"/>
-                </a:solidFill>
-                <a:latin typeface="Lato"/>
-                <a:ea typeface="Lato"/>
-                <a:cs typeface="Lato"/>
-                <a:sym typeface="Lato"/>
-              </a:rPr>
-              <a:t>rodoviária</a:t>
-            </a:r>
-            <a:r>
-              <a:rPr lang="en-US" sz="1275" b="0" i="0" u="none" strike="noStrike" cap="none" dirty="0">
-                <a:solidFill>
-                  <a:schemeClr val="bg1"/>
-                </a:solidFill>
-                <a:latin typeface="Lato"/>
-                <a:ea typeface="Lato"/>
-                <a:cs typeface="Lato"/>
-                <a:sym typeface="Lato"/>
-              </a:rPr>
-              <a:t> </a:t>
-            </a:r>
-            <a:r>
-              <a:rPr lang="en-US" sz="1275" b="0" i="0" u="none" strike="noStrike" cap="none" dirty="0" err="1">
-                <a:solidFill>
-                  <a:schemeClr val="bg1"/>
-                </a:solidFill>
-                <a:latin typeface="Lato"/>
-                <a:ea typeface="Lato"/>
-                <a:cs typeface="Lato"/>
-                <a:sym typeface="Lato"/>
-              </a:rPr>
-              <a:t>rodando</a:t>
-            </a:r>
-            <a:r>
-              <a:rPr lang="en-US" sz="1275" b="0" i="0" u="none" strike="noStrike" cap="none" dirty="0">
-                <a:solidFill>
-                  <a:schemeClr val="bg1"/>
-                </a:solidFill>
-                <a:latin typeface="Lato"/>
-                <a:ea typeface="Lato"/>
-                <a:cs typeface="Lato"/>
-                <a:sym typeface="Lato"/>
-              </a:rPr>
-              <a:t> </a:t>
-            </a:r>
-            <a:r>
-              <a:rPr lang="en-US" sz="1275" b="0" i="0" u="none" strike="noStrike" cap="none" dirty="0" err="1">
-                <a:solidFill>
-                  <a:schemeClr val="bg1"/>
-                </a:solidFill>
-                <a:latin typeface="Lato"/>
-                <a:ea typeface="Lato"/>
-                <a:cs typeface="Lato"/>
-                <a:sym typeface="Lato"/>
-              </a:rPr>
-              <a:t>ininterruptamente</a:t>
-            </a:r>
-            <a:r>
-              <a:rPr lang="en-US" sz="1275" b="0" i="0" u="none" strike="noStrike" cap="none" dirty="0">
-                <a:solidFill>
-                  <a:schemeClr val="bg1"/>
-                </a:solidFill>
-                <a:latin typeface="Lato"/>
-                <a:ea typeface="Lato"/>
-                <a:cs typeface="Lato"/>
-                <a:sym typeface="Lato"/>
-              </a:rPr>
-              <a:t>, com </a:t>
-            </a:r>
-            <a:r>
-              <a:rPr lang="en-US" sz="1275" b="0" i="0" u="none" strike="noStrike" cap="none" dirty="0" err="1">
-                <a:solidFill>
-                  <a:schemeClr val="bg1"/>
-                </a:solidFill>
-                <a:latin typeface="Lato"/>
-                <a:ea typeface="Lato"/>
-                <a:cs typeface="Lato"/>
-                <a:sym typeface="Lato"/>
-              </a:rPr>
-              <a:t>controle</a:t>
-            </a:r>
-            <a:r>
-              <a:rPr lang="en-US" sz="1275" b="0" i="0" u="none" strike="noStrike" cap="none" dirty="0">
-                <a:solidFill>
-                  <a:schemeClr val="bg1"/>
-                </a:solidFill>
-                <a:latin typeface="Lato"/>
-                <a:ea typeface="Lato"/>
-                <a:cs typeface="Lato"/>
-                <a:sym typeface="Lato"/>
-              </a:rPr>
-              <a:t> </a:t>
-            </a:r>
-            <a:r>
-              <a:rPr lang="en-US" sz="1275" b="0" i="0" u="none" strike="noStrike" cap="none" dirty="0" err="1">
-                <a:solidFill>
-                  <a:schemeClr val="bg1"/>
-                </a:solidFill>
-                <a:latin typeface="Lato"/>
-                <a:ea typeface="Lato"/>
-                <a:cs typeface="Lato"/>
-                <a:sym typeface="Lato"/>
-              </a:rPr>
-              <a:t>rigoroso</a:t>
-            </a:r>
-            <a:r>
-              <a:rPr lang="en-US" sz="1275" b="0" i="0" u="none" strike="noStrike" cap="none" dirty="0">
-                <a:solidFill>
-                  <a:schemeClr val="bg1"/>
-                </a:solidFill>
-                <a:latin typeface="Lato"/>
-                <a:ea typeface="Lato"/>
-                <a:cs typeface="Lato"/>
-                <a:sym typeface="Lato"/>
-              </a:rPr>
-              <a:t> de custos:</a:t>
-            </a:r>
-            <a:endParaRPr dirty="0">
-              <a:solidFill>
-                <a:schemeClr val="bg1"/>
-              </a:solidFill>
-            </a:endParaRPr>
-          </a:p>
-        </p:txBody>
-      </p:sp>
-      <p:sp>
-        <p:nvSpPr>
-          <p:cNvPr id="26" name="Google Shape;178;p17">
-            <a:extLst>
-              <a:ext uri="{FF2B5EF4-FFF2-40B4-BE49-F238E27FC236}">
-                <a16:creationId xmlns:a16="http://schemas.microsoft.com/office/drawing/2014/main" id="{F69CEEB6-F6B1-479C-B760-1128C55CA27B}"/>
-              </a:ext>
-            </a:extLst>
-          </p:cNvPr>
-          <p:cNvSpPr txBox="1"/>
-          <p:nvPr/>
-        </p:nvSpPr>
-        <p:spPr>
-          <a:xfrm>
-            <a:off x="5648325" y="3488962"/>
-            <a:ext cx="5781675" cy="588623"/>
-          </a:xfrm>
-          <a:prstGeom prst="rect">
-            <a:avLst/>
-          </a:prstGeom>
-          <a:noFill/>
-          <a:ln>
-            <a:noFill/>
-          </a:ln>
-        </p:spPr>
-        <p:txBody>
-          <a:bodyPr spcFirstLastPara="1" wrap="square" lIns="0" tIns="0" rIns="0" bIns="0" anchor="t" anchorCtr="0">
-            <a:spAutoFit/>
-          </a:bodyPr>
-          <a:lstStyle/>
-          <a:p>
-            <a:pPr marL="0" marR="0" lvl="0" indent="0" algn="l" rtl="0">
-              <a:lnSpc>
-                <a:spcPct val="149960"/>
-              </a:lnSpc>
-              <a:spcBef>
-                <a:spcPts val="0"/>
-              </a:spcBef>
-              <a:spcAft>
-                <a:spcPts val="0"/>
-              </a:spcAft>
-              <a:buNone/>
-            </a:pPr>
-            <a:r>
-              <a:rPr lang="en-US" sz="1275" b="1" i="0" u="none" strike="noStrike" cap="none" dirty="0">
-                <a:solidFill>
-                  <a:schemeClr val="bg1"/>
-                </a:solidFill>
-                <a:latin typeface="Lato"/>
-                <a:ea typeface="Lato"/>
-                <a:cs typeface="Lato"/>
-                <a:sym typeface="Lato"/>
-              </a:rPr>
-              <a:t>OPEX </a:t>
-            </a:r>
-            <a:r>
-              <a:rPr lang="en-US" sz="1275" b="1" i="0" u="none" strike="noStrike" cap="none" dirty="0" err="1">
-                <a:solidFill>
-                  <a:schemeClr val="bg1"/>
-                </a:solidFill>
-                <a:latin typeface="Lato"/>
-                <a:ea typeface="Lato"/>
-                <a:cs typeface="Lato"/>
-                <a:sym typeface="Lato"/>
-              </a:rPr>
-              <a:t>Otimizado</a:t>
-            </a:r>
-            <a:r>
-              <a:rPr lang="en-US" sz="1275" b="1" i="0" u="none" strike="noStrike" cap="none" dirty="0">
-                <a:solidFill>
-                  <a:schemeClr val="bg1"/>
-                </a:solidFill>
-                <a:latin typeface="Lato"/>
-                <a:ea typeface="Lato"/>
-                <a:cs typeface="Lato"/>
-                <a:sym typeface="Lato"/>
-              </a:rPr>
-              <a:t>:</a:t>
-            </a:r>
-            <a:r>
-              <a:rPr lang="en-US" sz="1275" b="0" i="0" u="none" strike="noStrike" cap="none" dirty="0">
-                <a:solidFill>
-                  <a:schemeClr val="bg1"/>
-                </a:solidFill>
-                <a:latin typeface="Lato"/>
-                <a:ea typeface="Lato"/>
-                <a:cs typeface="Lato"/>
-                <a:sym typeface="Lato"/>
-              </a:rPr>
-              <a:t> </a:t>
-            </a:r>
-            <a:r>
-              <a:rPr lang="en-US" sz="1275" b="0" i="0" u="none" strike="noStrike" cap="none" dirty="0" err="1">
-                <a:solidFill>
-                  <a:schemeClr val="bg1"/>
-                </a:solidFill>
-                <a:latin typeface="Lato"/>
-                <a:ea typeface="Lato"/>
-                <a:cs typeface="Lato"/>
-                <a:sym typeface="Lato"/>
-              </a:rPr>
-              <a:t>Arquitetura</a:t>
-            </a:r>
-            <a:r>
-              <a:rPr lang="en-US" sz="1275" b="0" i="0" u="none" strike="noStrike" cap="none" dirty="0">
-                <a:solidFill>
-                  <a:schemeClr val="bg1"/>
-                </a:solidFill>
-                <a:latin typeface="Lato"/>
-                <a:ea typeface="Lato"/>
-                <a:cs typeface="Lato"/>
-                <a:sym typeface="Lato"/>
-              </a:rPr>
-              <a:t> Cloud </a:t>
-            </a:r>
-            <a:r>
-              <a:rPr lang="en-US" sz="1275" b="0" i="0" u="none" strike="noStrike" cap="none" dirty="0" err="1">
-                <a:solidFill>
-                  <a:schemeClr val="bg1"/>
-                </a:solidFill>
-                <a:latin typeface="Lato"/>
-                <a:ea typeface="Lato"/>
-                <a:cs typeface="Lato"/>
-                <a:sym typeface="Lato"/>
-              </a:rPr>
-              <a:t>escalável</a:t>
-            </a:r>
-            <a:r>
-              <a:rPr lang="en-US" sz="1275" b="0" i="0" u="none" strike="noStrike" cap="none" dirty="0">
-                <a:solidFill>
-                  <a:schemeClr val="bg1"/>
-                </a:solidFill>
-                <a:latin typeface="Lato"/>
-                <a:ea typeface="Lato"/>
-                <a:cs typeface="Lato"/>
-                <a:sym typeface="Lato"/>
-              </a:rPr>
-              <a:t> </a:t>
-            </a:r>
-            <a:r>
-              <a:rPr lang="en-US" sz="1275" b="0" i="0" u="none" strike="noStrike" cap="none" dirty="0" err="1">
-                <a:solidFill>
-                  <a:schemeClr val="bg1"/>
-                </a:solidFill>
-                <a:latin typeface="Lato"/>
-                <a:ea typeface="Lato"/>
-                <a:cs typeface="Lato"/>
-                <a:sym typeface="Lato"/>
-              </a:rPr>
-              <a:t>baseada</a:t>
-            </a:r>
-            <a:r>
-              <a:rPr lang="en-US" sz="1275" b="0" i="0" u="none" strike="noStrike" cap="none" dirty="0">
-                <a:solidFill>
-                  <a:schemeClr val="bg1"/>
-                </a:solidFill>
-                <a:latin typeface="Lato"/>
-                <a:ea typeface="Lato"/>
-                <a:cs typeface="Lato"/>
-                <a:sym typeface="Lato"/>
-              </a:rPr>
-              <a:t> </a:t>
-            </a:r>
-            <a:r>
-              <a:rPr lang="en-US" sz="1275" b="0" i="0" u="none" strike="noStrike" cap="none" dirty="0" err="1">
-                <a:solidFill>
-                  <a:schemeClr val="bg1"/>
-                </a:solidFill>
-                <a:latin typeface="Lato"/>
-                <a:ea typeface="Lato"/>
-                <a:cs typeface="Lato"/>
-                <a:sym typeface="Lato"/>
-              </a:rPr>
-              <a:t>em</a:t>
-            </a:r>
-            <a:r>
-              <a:rPr lang="en-US" sz="1275" b="0" i="0" u="none" strike="noStrike" cap="none" dirty="0">
-                <a:solidFill>
-                  <a:schemeClr val="bg1"/>
-                </a:solidFill>
-                <a:latin typeface="Lato"/>
-                <a:ea typeface="Lato"/>
-                <a:cs typeface="Lato"/>
-                <a:sym typeface="Lato"/>
-              </a:rPr>
-              <a:t> </a:t>
-            </a:r>
-            <a:r>
-              <a:rPr lang="en-US" sz="1275" b="0" i="0" u="none" strike="noStrike" cap="none" dirty="0" err="1">
-                <a:solidFill>
-                  <a:schemeClr val="bg1"/>
-                </a:solidFill>
-                <a:latin typeface="Lato"/>
-                <a:ea typeface="Lato"/>
-                <a:cs typeface="Lato"/>
-                <a:sym typeface="Lato"/>
-              </a:rPr>
-              <a:t>consumo</a:t>
-            </a:r>
-            <a:r>
-              <a:rPr lang="en-US" sz="1275" b="0" i="0" u="none" strike="noStrike" cap="none" dirty="0">
-                <a:solidFill>
-                  <a:schemeClr val="bg1"/>
-                </a:solidFill>
-                <a:latin typeface="Lato"/>
-                <a:ea typeface="Lato"/>
-                <a:cs typeface="Lato"/>
-                <a:sym typeface="Lato"/>
-              </a:rPr>
-              <a:t> sob </a:t>
-            </a:r>
-            <a:r>
-              <a:rPr lang="en-US" sz="1275" b="0" i="0" u="none" strike="noStrike" cap="none" dirty="0" err="1">
-                <a:solidFill>
-                  <a:schemeClr val="bg1"/>
-                </a:solidFill>
-                <a:latin typeface="Lato"/>
-                <a:ea typeface="Lato"/>
-                <a:cs typeface="Lato"/>
-                <a:sym typeface="Lato"/>
-              </a:rPr>
-              <a:t>demanda</a:t>
-            </a:r>
-            <a:r>
-              <a:rPr lang="en-US" sz="1275" b="0" i="0" u="none" strike="noStrike" cap="none" dirty="0">
-                <a:solidFill>
-                  <a:schemeClr val="bg1"/>
-                </a:solidFill>
-                <a:latin typeface="Lato"/>
-                <a:ea typeface="Lato"/>
-                <a:cs typeface="Lato"/>
-                <a:sym typeface="Lato"/>
-              </a:rPr>
-              <a:t>, </a:t>
-            </a:r>
-            <a:r>
-              <a:rPr lang="en-US" sz="1275" b="0" i="0" u="none" strike="noStrike" cap="none" dirty="0" err="1">
-                <a:solidFill>
-                  <a:schemeClr val="bg1"/>
-                </a:solidFill>
-                <a:latin typeface="Lato"/>
-                <a:ea typeface="Lato"/>
-                <a:cs typeface="Lato"/>
-                <a:sym typeface="Lato"/>
-              </a:rPr>
-              <a:t>orçada</a:t>
-            </a:r>
-            <a:r>
-              <a:rPr lang="en-US" sz="1275" b="0" i="0" u="none" strike="noStrike" cap="none" dirty="0">
-                <a:solidFill>
-                  <a:schemeClr val="bg1"/>
-                </a:solidFill>
-                <a:latin typeface="Lato"/>
-                <a:ea typeface="Lato"/>
-                <a:cs typeface="Lato"/>
-                <a:sym typeface="Lato"/>
-              </a:rPr>
-              <a:t> </a:t>
-            </a:r>
-            <a:r>
-              <a:rPr lang="en-US" sz="1275" b="0" i="0" u="none" strike="noStrike" cap="none" dirty="0" err="1">
-                <a:solidFill>
-                  <a:schemeClr val="bg1"/>
-                </a:solidFill>
-                <a:latin typeface="Lato"/>
-                <a:ea typeface="Lato"/>
-                <a:cs typeface="Lato"/>
-                <a:sym typeface="Lato"/>
-              </a:rPr>
-              <a:t>em</a:t>
-            </a:r>
-            <a:r>
-              <a:rPr lang="en-US" sz="1275" b="0" i="0" u="none" strike="noStrike" cap="none" dirty="0">
-                <a:solidFill>
-                  <a:schemeClr val="bg1"/>
-                </a:solidFill>
-                <a:latin typeface="Lato"/>
-                <a:ea typeface="Lato"/>
-                <a:cs typeface="Lato"/>
-                <a:sym typeface="Lato"/>
-              </a:rPr>
-              <a:t> </a:t>
-            </a:r>
-            <a:r>
-              <a:rPr lang="en-US" sz="1275" b="0" i="0" u="none" strike="noStrike" cap="none" dirty="0" err="1">
-                <a:solidFill>
-                  <a:schemeClr val="bg1"/>
-                </a:solidFill>
-                <a:latin typeface="Lato"/>
-                <a:ea typeface="Lato"/>
-                <a:cs typeface="Lato"/>
-                <a:sym typeface="Lato"/>
-              </a:rPr>
-              <a:t>apenas</a:t>
-            </a:r>
-            <a:r>
-              <a:rPr lang="en-US" sz="1275" b="0" i="0" u="none" strike="noStrike" cap="none" dirty="0">
-                <a:solidFill>
-                  <a:schemeClr val="bg1"/>
-                </a:solidFill>
-                <a:latin typeface="Lato"/>
-                <a:ea typeface="Lato"/>
-                <a:cs typeface="Lato"/>
-                <a:sym typeface="Lato"/>
-              </a:rPr>
-              <a:t> </a:t>
-            </a:r>
-            <a:r>
-              <a:rPr lang="en-US" sz="1275" b="1" i="0" u="none" strike="noStrike" cap="none" dirty="0">
-                <a:solidFill>
-                  <a:schemeClr val="bg1"/>
-                </a:solidFill>
-                <a:latin typeface="Lato"/>
-                <a:ea typeface="Lato"/>
-                <a:cs typeface="Lato"/>
-                <a:sym typeface="Lato"/>
-              </a:rPr>
-              <a:t>R$ 200,00/</a:t>
-            </a:r>
-            <a:r>
-              <a:rPr lang="en-US" sz="1275" b="1" i="0" u="none" strike="noStrike" cap="none" dirty="0" err="1">
-                <a:solidFill>
-                  <a:schemeClr val="bg1"/>
-                </a:solidFill>
-                <a:latin typeface="Lato"/>
-                <a:ea typeface="Lato"/>
-                <a:cs typeface="Lato"/>
-                <a:sym typeface="Lato"/>
-              </a:rPr>
-              <a:t>mês</a:t>
-            </a:r>
-            <a:r>
-              <a:rPr lang="en-US" sz="1275" b="0" i="0" u="none" strike="noStrike" cap="none" dirty="0">
-                <a:solidFill>
-                  <a:schemeClr val="bg1"/>
-                </a:solidFill>
-                <a:latin typeface="Lato"/>
-                <a:ea typeface="Lato"/>
-                <a:cs typeface="Lato"/>
-                <a:sym typeface="Lato"/>
-              </a:rPr>
-              <a:t>.</a:t>
-            </a:r>
-            <a:endParaRPr dirty="0">
-              <a:solidFill>
-                <a:schemeClr val="bg1"/>
-              </a:solidFill>
-            </a:endParaRPr>
-          </a:p>
-        </p:txBody>
-      </p:sp>
-      <p:sp>
-        <p:nvSpPr>
-          <p:cNvPr id="27" name="Google Shape;180;p17">
-            <a:extLst>
-              <a:ext uri="{FF2B5EF4-FFF2-40B4-BE49-F238E27FC236}">
-                <a16:creationId xmlns:a16="http://schemas.microsoft.com/office/drawing/2014/main" id="{C3E107F9-F610-4720-9C35-F7639B94919C}"/>
-              </a:ext>
-            </a:extLst>
-          </p:cNvPr>
-          <p:cNvSpPr txBox="1"/>
-          <p:nvPr/>
-        </p:nvSpPr>
-        <p:spPr>
-          <a:xfrm>
-            <a:off x="5648325" y="4983956"/>
-            <a:ext cx="5781675" cy="588623"/>
-          </a:xfrm>
-          <a:prstGeom prst="rect">
-            <a:avLst/>
-          </a:prstGeom>
-          <a:noFill/>
-          <a:ln>
-            <a:noFill/>
-          </a:ln>
-        </p:spPr>
-        <p:txBody>
-          <a:bodyPr spcFirstLastPara="1" wrap="square" lIns="0" tIns="0" rIns="0" bIns="0" anchor="t" anchorCtr="0">
-            <a:spAutoFit/>
-          </a:bodyPr>
-          <a:lstStyle/>
-          <a:p>
-            <a:pPr marL="0" marR="0" lvl="0" indent="0" algn="l" rtl="0">
-              <a:lnSpc>
-                <a:spcPct val="149960"/>
-              </a:lnSpc>
-              <a:spcBef>
-                <a:spcPts val="0"/>
-              </a:spcBef>
-              <a:spcAft>
-                <a:spcPts val="0"/>
-              </a:spcAft>
-              <a:buNone/>
-            </a:pPr>
-            <a:r>
-              <a:rPr lang="pt-BR" sz="1275" b="1" i="0" u="none" strike="noStrike" cap="none" dirty="0">
-                <a:solidFill>
-                  <a:schemeClr val="bg1"/>
-                </a:solidFill>
-                <a:latin typeface="Lato"/>
-                <a:ea typeface="Lato"/>
-                <a:cs typeface="Lato"/>
-                <a:sym typeface="Lato"/>
-              </a:rPr>
-              <a:t>Reserva de Escopo:</a:t>
-            </a:r>
-            <a:r>
-              <a:rPr lang="pt-BR" sz="1275" b="0" i="0" u="none" strike="noStrike" cap="none" dirty="0">
-                <a:solidFill>
-                  <a:schemeClr val="bg1"/>
-                </a:solidFill>
-                <a:latin typeface="Lato"/>
-                <a:ea typeface="Lato"/>
-                <a:cs typeface="Lato"/>
-                <a:sym typeface="Lato"/>
-              </a:rPr>
-              <a:t> Contingência técnica de </a:t>
-            </a:r>
-            <a:r>
-              <a:rPr lang="pt-BR" sz="1275" b="1" i="0" u="none" strike="noStrike" cap="none" dirty="0">
-                <a:solidFill>
-                  <a:schemeClr val="bg1"/>
-                </a:solidFill>
-                <a:latin typeface="Lato"/>
-                <a:ea typeface="Lato"/>
-                <a:cs typeface="Lato"/>
-                <a:sym typeface="Lato"/>
-              </a:rPr>
-              <a:t>R$ 5.320,00</a:t>
-            </a:r>
-            <a:r>
-              <a:rPr lang="pt-BR" sz="1275" b="0" i="0" u="none" strike="noStrike" cap="none" dirty="0">
-                <a:solidFill>
-                  <a:schemeClr val="bg1"/>
-                </a:solidFill>
-                <a:latin typeface="Lato"/>
-                <a:ea typeface="Lato"/>
-                <a:cs typeface="Lato"/>
-                <a:sym typeface="Lato"/>
-              </a:rPr>
-              <a:t> provisionada no orçamento inicial de desenvolvimento.</a:t>
-            </a:r>
-            <a:endParaRPr lang="pt-BR" sz="1200" dirty="0">
-              <a:solidFill>
-                <a:schemeClr val="bg1"/>
-              </a:solidFill>
-            </a:endParaRPr>
-          </a:p>
-        </p:txBody>
-      </p:sp>
-      <p:pic>
-        <p:nvPicPr>
-          <p:cNvPr id="29" name="Google Shape;177;p17" descr="image.png">
-            <a:extLst>
-              <a:ext uri="{FF2B5EF4-FFF2-40B4-BE49-F238E27FC236}">
-                <a16:creationId xmlns:a16="http://schemas.microsoft.com/office/drawing/2014/main" id="{24464D7B-DB09-4EEF-A325-5E0D8FFE9FAD}"/>
-              </a:ext>
-            </a:extLst>
-          </p:cNvPr>
-          <p:cNvPicPr preferRelativeResize="0"/>
-          <p:nvPr/>
-        </p:nvPicPr>
-        <p:blipFill rotWithShape="1">
-          <a:blip r:embed="rId4">
-            <a:alphaModFix/>
-          </a:blip>
-          <a:srcRect/>
-          <a:stretch/>
-        </p:blipFill>
-        <p:spPr>
-          <a:xfrm>
-            <a:off x="1143000" y="2185987"/>
-            <a:ext cx="3314700" cy="3314700"/>
-          </a:xfrm>
-          <a:prstGeom prst="rect">
-            <a:avLst/>
-          </a:prstGeom>
-          <a:noFill/>
-          <a:ln>
-            <a:noFill/>
-          </a:ln>
-        </p:spPr>
-      </p:pic>
-    </p:spTree>
-    <p:extLst>
-      <p:ext uri="{BB962C8B-B14F-4D97-AF65-F5344CB8AC3E}">
-        <p14:creationId xmlns:p14="http://schemas.microsoft.com/office/powerpoint/2010/main" val="3373011535"/>
-      </p:ext>
-    </p:extLst>
-  </p:cSld>
-  <p:clrMapOvr>
-    <a:masterClrMapping/>
-  </p:clrMapOvr>
-</p:sld>
-</file>
-
 <file path=ppt/slides/slide7.xml><?xml version="1.0" encoding="utf-8"?>
 <p:sld xmlns:a="http://schemas.openxmlformats.org/drawingml/2006/main" xmlns:r="http://schemas.openxmlformats.org/officeDocument/2006/relationships" xmlns:p="http://schemas.openxmlformats.org/presentationml/2006/main">
   <p:cSld>

--- a/Docs/Slides.pptx
+++ b/Docs/Slides.pptx
@@ -15459,7 +15459,7 @@
               <a:buNone/>
             </a:pPr>
             <a:r>
-              <a:rPr lang="en-US" sz="2800" b="1" u="sng" strike="noStrike" cap="none" dirty="0">
+              <a:rPr lang="en-US" sz="2800" b="1" i="1" strike="noStrike" cap="none" dirty="0">
                 <a:solidFill>
                   <a:srgbClr val="F8FAFC"/>
                 </a:solidFill>
@@ -15471,7 +15471,7 @@
               <a:t>"</a:t>
             </a:r>
             <a:r>
-              <a:rPr lang="en-US" sz="2800" b="1" u="sng" strike="noStrike" cap="none" dirty="0" err="1">
+              <a:rPr lang="en-US" sz="2800" b="1" i="1" strike="noStrike" cap="none" dirty="0" err="1">
                 <a:solidFill>
                   <a:srgbClr val="F8FAFC"/>
                 </a:solidFill>
@@ -15483,7 +15483,7 @@
               <a:t>Modernizando</a:t>
             </a:r>
             <a:r>
-              <a:rPr lang="en-US" sz="2800" b="1" u="sng" strike="noStrike" cap="none" dirty="0">
+              <a:rPr lang="en-US" sz="2800" b="1" i="1" strike="noStrike" cap="none" dirty="0">
                 <a:solidFill>
                   <a:srgbClr val="F8FAFC"/>
                 </a:solidFill>
@@ -15495,7 +15495,7 @@
               <a:t> </a:t>
             </a:r>
             <a:r>
-              <a:rPr lang="en-US" sz="2800" b="1" u="sng" strike="noStrike" cap="none" dirty="0" err="1">
+              <a:rPr lang="en-US" sz="2800" b="1" i="1" strike="noStrike" cap="none" dirty="0" err="1">
                 <a:solidFill>
                   <a:srgbClr val="F8FAFC"/>
                 </a:solidFill>
@@ -15507,7 +15507,7 @@
               <a:t>processos</a:t>
             </a:r>
             <a:r>
-              <a:rPr lang="en-US" sz="2800" b="1" u="sng" strike="noStrike" cap="none" dirty="0">
+              <a:rPr lang="en-US" sz="2800" b="1" i="1" strike="noStrike" cap="none" dirty="0">
                 <a:solidFill>
                   <a:srgbClr val="F8FAFC"/>
                 </a:solidFill>
@@ -15519,7 +15519,7 @@
               <a:t> </a:t>
             </a:r>
             <a:r>
-              <a:rPr lang="en-US" sz="2800" b="1" u="sng" strike="noStrike" cap="none" dirty="0" err="1">
+              <a:rPr lang="en-US" sz="2800" b="1" i="1" strike="noStrike" cap="none" dirty="0" err="1">
                 <a:solidFill>
                   <a:srgbClr val="F8FAFC"/>
                 </a:solidFill>
@@ -15531,7 +15531,7 @@
               <a:t>manuais</a:t>
             </a:r>
             <a:r>
-              <a:rPr lang="en-US" sz="2800" b="1" u="sng" strike="noStrike" cap="none" dirty="0">
+              <a:rPr lang="en-US" sz="2800" b="1" i="1" strike="noStrike" cap="none" dirty="0">
                 <a:solidFill>
                   <a:srgbClr val="F8FAFC"/>
                 </a:solidFill>
@@ -15542,7 +15542,7 @@
               </a:rPr>
               <a:t>”</a:t>
             </a:r>
-            <a:endParaRPr sz="2400" b="1" u="sng" strike="noStrike" cap="none" dirty="0">
+            <a:endParaRPr sz="2400" b="1" i="1" strike="noStrike" cap="none" dirty="0">
               <a:solidFill>
                 <a:srgbClr val="000000"/>
               </a:solidFill>
